--- a/curso/pptx/S19.pptx
+++ b/curso/pptx/S19.pptx
@@ -3892,8 +3892,8 @@
         </p:nvSpPr>
         <p:spPr>
           <a:xfrm>
-            <a:off x="640000" y="420000"/>
-            <a:ext cx="10912000" cy="420000"/>
+            <a:off x="10652000" y="380000"/>
+            <a:ext cx="900000" cy="800000"/>
           </a:xfrm>
           <a:prstGeom prst="rect">
             <a:avLst/>
@@ -3908,17 +3908,17 @@
           <a:p>
             <a:pPr>
               <a:spcAft>
-                <a:spcPts val="810"/>
-              </a:spcAft>
-            </a:pPr>
-            <a:r>
-              <a:rPr sz="1800" b="1">
+                <a:spcPts val="1980"/>
+              </a:spcAft>
+            </a:pPr>
+            <a:r>
+              <a:rPr sz="4400" b="0">
                 <a:solidFill>
                   <a:srgbClr val="1F2A44"/>
                 </a:solidFill>
                 <a:latin typeface="Nunito Sans"/>
               </a:rPr>
-              <a:t>🦉 Aula de Filosofía</a:t>
+              <a:t>🙃</a:t>
             </a:r>
           </a:p>
         </p:txBody>

--- a/curso/pptx/S19.pptx
+++ b/curso/pptx/S19.pptx
@@ -473,426 +473,6 @@
     </a:lvl9pPr>
   </p:notesStyle>
 </p:notesMaster>
-</file>
-
-<file path=ppt/notesSlides/notesSlide1.xml><?xml version="1.0" encoding="utf-8"?>
-<p:notes xmlns:a="http://schemas.openxmlformats.org/drawingml/2006/main" xmlns:p="http://schemas.openxmlformats.org/presentationml/2006/main" xmlns:r="http://schemas.openxmlformats.org/officeDocument/2006/relationships">
-  <p:cSld>
-    <p:spTree>
-      <p:nvGrpSpPr>
-        <p:cNvPr id="1" name=""/>
-        <p:cNvGrpSpPr/>
-        <p:nvPr/>
-      </p:nvGrpSpPr>
-      <p:grpSpPr>
-        <a:xfrm>
-          <a:off x="0" y="0"/>
-          <a:ext cx="0" cy="0"/>
-          <a:chOff x="0" y="0"/>
-          <a:chExt cx="0" cy="0"/>
-        </a:xfrm>
-      </p:grpSpPr>
-      <p:sp>
-        <p:nvSpPr>
-          <p:cNvPr id="2" name="Slide Image Placeholder 1"/>
-          <p:cNvSpPr>
-            <a:spLocks noGrp="1"/>
-          </p:cNvSpPr>
-          <p:nvPr>
-            <p:ph type="sldImg" idx="2"/>
-          </p:nvPr>
-        </p:nvSpPr>
-        <p:spPr/>
-      </p:sp>
-      <p:sp>
-        <p:nvSpPr>
-          <p:cNvPr id="3" name="Notes Placeholder 2"/>
-          <p:cNvSpPr>
-            <a:spLocks noGrp="1"/>
-          </p:cNvSpPr>
-          <p:nvPr>
-            <p:ph type="body" idx="3" sz="quarter"/>
-          </p:nvPr>
-        </p:nvSpPr>
-        <p:spPr/>
-        <p:txBody>
-          <a:bodyPr/>
-          <a:lstStyle/>
-          <a:p>
-            <a:r>
-              <a:t>3 minutos. Sin apuntes. Es para recordar, no cuenta para nota.</a:t>
-            </a:r>
-          </a:p>
-        </p:txBody>
-      </p:sp>
-      <p:sp>
-        <p:nvSpPr>
-          <p:cNvPr id="4" name="Slide Number Placeholder 3"/>
-          <p:cNvSpPr>
-            <a:spLocks noGrp="1"/>
-          </p:cNvSpPr>
-          <p:nvPr>
-            <p:ph type="sldNum" idx="5" sz="quarter"/>
-          </p:nvPr>
-        </p:nvSpPr>
-        <p:spPr/>
-      </p:sp>
-    </p:spTree>
-  </p:cSld>
-  <p:clrMapOvr>
-    <a:masterClrMapping/>
-  </p:clrMapOvr>
-</p:notes>
-</file>
-
-<file path=ppt/notesSlides/notesSlide2.xml><?xml version="1.0" encoding="utf-8"?>
-<p:notes xmlns:a="http://schemas.openxmlformats.org/drawingml/2006/main" xmlns:p="http://schemas.openxmlformats.org/presentationml/2006/main" xmlns:r="http://schemas.openxmlformats.org/officeDocument/2006/relationships">
-  <p:cSld>
-    <p:spTree>
-      <p:nvGrpSpPr>
-        <p:cNvPr id="1" name=""/>
-        <p:cNvGrpSpPr/>
-        <p:nvPr/>
-      </p:nvGrpSpPr>
-      <p:grpSpPr>
-        <a:xfrm>
-          <a:off x="0" y="0"/>
-          <a:ext cx="0" cy="0"/>
-          <a:chOff x="0" y="0"/>
-          <a:chExt cx="0" cy="0"/>
-        </a:xfrm>
-      </p:grpSpPr>
-      <p:sp>
-        <p:nvSpPr>
-          <p:cNvPr id="2" name="Slide Image Placeholder 1"/>
-          <p:cNvSpPr>
-            <a:spLocks noGrp="1"/>
-          </p:cNvSpPr>
-          <p:nvPr>
-            <p:ph type="sldImg" idx="2"/>
-          </p:nvPr>
-        </p:nvSpPr>
-        <p:spPr/>
-      </p:sp>
-      <p:sp>
-        <p:nvSpPr>
-          <p:cNvPr id="3" name="Notes Placeholder 2"/>
-          <p:cNvSpPr>
-            <a:spLocks noGrp="1"/>
-          </p:cNvSpPr>
-          <p:nvPr>
-            <p:ph type="body" idx="3" sz="quarter"/>
-          </p:nvPr>
-        </p:nvSpPr>
-        <p:spPr/>
-        <p:txBody>
-          <a:bodyPr/>
-          <a:lstStyle/>
-          <a:p>
-            <a:r>
-              <a:t>3 minutos. Sin apuntes. Es para recordar, no cuenta para nota.</a:t>
-            </a:r>
-          </a:p>
-        </p:txBody>
-      </p:sp>
-      <p:sp>
-        <p:nvSpPr>
-          <p:cNvPr id="4" name="Slide Number Placeholder 3"/>
-          <p:cNvSpPr>
-            <a:spLocks noGrp="1"/>
-          </p:cNvSpPr>
-          <p:nvPr>
-            <p:ph type="sldNum" idx="5" sz="quarter"/>
-          </p:nvPr>
-        </p:nvSpPr>
-        <p:spPr/>
-      </p:sp>
-    </p:spTree>
-  </p:cSld>
-  <p:clrMapOvr>
-    <a:masterClrMapping/>
-  </p:clrMapOvr>
-</p:notes>
-</file>
-
-<file path=ppt/notesSlides/notesSlide3.xml><?xml version="1.0" encoding="utf-8"?>
-<p:notes xmlns:a="http://schemas.openxmlformats.org/drawingml/2006/main" xmlns:p="http://schemas.openxmlformats.org/presentationml/2006/main" xmlns:r="http://schemas.openxmlformats.org/officeDocument/2006/relationships">
-  <p:cSld>
-    <p:spTree>
-      <p:nvGrpSpPr>
-        <p:cNvPr id="1" name=""/>
-        <p:cNvGrpSpPr/>
-        <p:nvPr/>
-      </p:nvGrpSpPr>
-      <p:grpSpPr>
-        <a:xfrm>
-          <a:off x="0" y="0"/>
-          <a:ext cx="0" cy="0"/>
-          <a:chOff x="0" y="0"/>
-          <a:chExt cx="0" cy="0"/>
-        </a:xfrm>
-      </p:grpSpPr>
-      <p:sp>
-        <p:nvSpPr>
-          <p:cNvPr id="2" name="Slide Image Placeholder 1"/>
-          <p:cNvSpPr>
-            <a:spLocks noGrp="1"/>
-          </p:cNvSpPr>
-          <p:nvPr>
-            <p:ph type="sldImg" idx="2"/>
-          </p:nvPr>
-        </p:nvSpPr>
-        <p:spPr/>
-      </p:sp>
-      <p:sp>
-        <p:nvSpPr>
-          <p:cNvPr id="3" name="Notes Placeholder 2"/>
-          <p:cNvSpPr>
-            <a:spLocks noGrp="1"/>
-          </p:cNvSpPr>
-          <p:nvPr>
-            <p:ph type="body" idx="3" sz="quarter"/>
-          </p:nvPr>
-        </p:nvSpPr>
-        <p:spPr/>
-        <p:txBody>
-          <a:bodyPr/>
-          <a:lstStyle/>
-          <a:p>
-            <a:r>
-              <a:t>Nadie tiene que contestar: solo pensarlo.</a:t>
-            </a:r>
-          </a:p>
-        </p:txBody>
-      </p:sp>
-      <p:sp>
-        <p:nvSpPr>
-          <p:cNvPr id="4" name="Slide Number Placeholder 3"/>
-          <p:cNvSpPr>
-            <a:spLocks noGrp="1"/>
-          </p:cNvSpPr>
-          <p:nvPr>
-            <p:ph type="sldNum" idx="5" sz="quarter"/>
-          </p:nvPr>
-        </p:nvSpPr>
-        <p:spPr/>
-      </p:sp>
-    </p:spTree>
-  </p:cSld>
-  <p:clrMapOvr>
-    <a:masterClrMapping/>
-  </p:clrMapOvr>
-</p:notes>
-</file>
-
-<file path=ppt/notesSlides/notesSlide4.xml><?xml version="1.0" encoding="utf-8"?>
-<p:notes xmlns:a="http://schemas.openxmlformats.org/drawingml/2006/main" xmlns:p="http://schemas.openxmlformats.org/presentationml/2006/main" xmlns:r="http://schemas.openxmlformats.org/officeDocument/2006/relationships">
-  <p:cSld>
-    <p:spTree>
-      <p:nvGrpSpPr>
-        <p:cNvPr id="1" name=""/>
-        <p:cNvGrpSpPr/>
-        <p:nvPr/>
-      </p:nvGrpSpPr>
-      <p:grpSpPr>
-        <a:xfrm>
-          <a:off x="0" y="0"/>
-          <a:ext cx="0" cy="0"/>
-          <a:chOff x="0" y="0"/>
-          <a:chExt cx="0" cy="0"/>
-        </a:xfrm>
-      </p:grpSpPr>
-      <p:sp>
-        <p:nvSpPr>
-          <p:cNvPr id="2" name="Slide Image Placeholder 1"/>
-          <p:cNvSpPr>
-            <a:spLocks noGrp="1"/>
-          </p:cNvSpPr>
-          <p:nvPr>
-            <p:ph type="sldImg" idx="2"/>
-          </p:nvPr>
-        </p:nvSpPr>
-        <p:spPr/>
-      </p:sp>
-      <p:sp>
-        <p:nvSpPr>
-          <p:cNvPr id="3" name="Notes Placeholder 2"/>
-          <p:cNvSpPr>
-            <a:spLocks noGrp="1"/>
-          </p:cNvSpPr>
-          <p:nvPr>
-            <p:ph type="body" idx="3" sz="quarter"/>
-          </p:nvPr>
-        </p:nvSpPr>
-        <p:spPr/>
-        <p:txBody>
-          <a:bodyPr/>
-          <a:lstStyle/>
-          <a:p>
-            <a:r>
-              <a:t>Dejar unos segundos para que piensen la respuesta fácil antes de enseñar los pasos.</a:t>
-            </a:r>
-          </a:p>
-        </p:txBody>
-      </p:sp>
-      <p:sp>
-        <p:nvSpPr>
-          <p:cNvPr id="4" name="Slide Number Placeholder 3"/>
-          <p:cNvSpPr>
-            <a:spLocks noGrp="1"/>
-          </p:cNvSpPr>
-          <p:nvPr>
-            <p:ph type="sldNum" idx="5" sz="quarter"/>
-          </p:nvPr>
-        </p:nvSpPr>
-        <p:spPr/>
-      </p:sp>
-    </p:spTree>
-  </p:cSld>
-  <p:clrMapOvr>
-    <a:masterClrMapping/>
-  </p:clrMapOvr>
-</p:notes>
-</file>
-
-<file path=ppt/notesSlides/notesSlide5.xml><?xml version="1.0" encoding="utf-8"?>
-<p:notes xmlns:a="http://schemas.openxmlformats.org/drawingml/2006/main" xmlns:p="http://schemas.openxmlformats.org/presentationml/2006/main" xmlns:r="http://schemas.openxmlformats.org/officeDocument/2006/relationships">
-  <p:cSld>
-    <p:spTree>
-      <p:nvGrpSpPr>
-        <p:cNvPr id="1" name=""/>
-        <p:cNvGrpSpPr/>
-        <p:nvPr/>
-      </p:nvGrpSpPr>
-      <p:grpSpPr>
-        <a:xfrm>
-          <a:off x="0" y="0"/>
-          <a:ext cx="0" cy="0"/>
-          <a:chOff x="0" y="0"/>
-          <a:chExt cx="0" cy="0"/>
-        </a:xfrm>
-      </p:grpSpPr>
-      <p:sp>
-        <p:nvSpPr>
-          <p:cNvPr id="2" name="Slide Image Placeholder 1"/>
-          <p:cNvSpPr>
-            <a:spLocks noGrp="1"/>
-          </p:cNvSpPr>
-          <p:nvPr>
-            <p:ph type="sldImg" idx="2"/>
-          </p:nvPr>
-        </p:nvSpPr>
-        <p:spPr/>
-      </p:sp>
-      <p:sp>
-        <p:nvSpPr>
-          <p:cNvPr id="3" name="Notes Placeholder 2"/>
-          <p:cNvSpPr>
-            <a:spLocks noGrp="1"/>
-          </p:cNvSpPr>
-          <p:nvPr>
-            <p:ph type="body" idx="3" sz="quarter"/>
-          </p:nvPr>
-        </p:nvSpPr>
-        <p:spPr/>
-        <p:txBody>
-          <a:bodyPr/>
-          <a:lstStyle/>
-          <a:p>
-            <a:r>
-              <a:t>Dejar 2 minutos para que lo escriban. La diapositiva siguiente muestra el resumen.</a:t>
-            </a:r>
-          </a:p>
-        </p:txBody>
-      </p:sp>
-      <p:sp>
-        <p:nvSpPr>
-          <p:cNvPr id="4" name="Slide Number Placeholder 3"/>
-          <p:cNvSpPr>
-            <a:spLocks noGrp="1"/>
-          </p:cNvSpPr>
-          <p:nvPr>
-            <p:ph type="sldNum" idx="5" sz="quarter"/>
-          </p:nvPr>
-        </p:nvSpPr>
-        <p:spPr/>
-      </p:sp>
-    </p:spTree>
-  </p:cSld>
-  <p:clrMapOvr>
-    <a:masterClrMapping/>
-  </p:clrMapOvr>
-</p:notes>
-</file>
-
-<file path=ppt/notesSlides/notesSlide6.xml><?xml version="1.0" encoding="utf-8"?>
-<p:notes xmlns:a="http://schemas.openxmlformats.org/drawingml/2006/main" xmlns:p="http://schemas.openxmlformats.org/presentationml/2006/main" xmlns:r="http://schemas.openxmlformats.org/officeDocument/2006/relationships">
-  <p:cSld>
-    <p:spTree>
-      <p:nvGrpSpPr>
-        <p:cNvPr id="1" name=""/>
-        <p:cNvGrpSpPr/>
-        <p:nvPr/>
-      </p:nvGrpSpPr>
-      <p:grpSpPr>
-        <a:xfrm>
-          <a:off x="0" y="0"/>
-          <a:ext cx="0" cy="0"/>
-          <a:chOff x="0" y="0"/>
-          <a:chExt cx="0" cy="0"/>
-        </a:xfrm>
-      </p:grpSpPr>
-      <p:sp>
-        <p:nvSpPr>
-          <p:cNvPr id="2" name="Slide Image Placeholder 1"/>
-          <p:cNvSpPr>
-            <a:spLocks noGrp="1"/>
-          </p:cNvSpPr>
-          <p:nvPr>
-            <p:ph type="sldImg" idx="2"/>
-          </p:nvPr>
-        </p:nvSpPr>
-        <p:spPr/>
-      </p:sp>
-      <p:sp>
-        <p:nvSpPr>
-          <p:cNvPr id="3" name="Notes Placeholder 2"/>
-          <p:cNvSpPr>
-            <a:spLocks noGrp="1"/>
-          </p:cNvSpPr>
-          <p:nvPr>
-            <p:ph type="body" idx="3" sz="quarter"/>
-          </p:nvPr>
-        </p:nvSpPr>
-        <p:spPr/>
-        <p:txBody>
-          <a:bodyPr/>
-          <a:lstStyle/>
-          <a:p>
-            <a:r>
-              <a:t>Buscar: «generalización apresurada falacia» · «generalización precipitada ejemplos»</a:t>
-            </a:r>
-          </a:p>
-        </p:txBody>
-      </p:sp>
-      <p:sp>
-        <p:nvSpPr>
-          <p:cNvPr id="4" name="Slide Number Placeholder 3"/>
-          <p:cNvSpPr>
-            <a:spLocks noGrp="1"/>
-          </p:cNvSpPr>
-          <p:nvPr>
-            <p:ph type="sldNum" idx="5" sz="quarter"/>
-          </p:nvPr>
-        </p:nvSpPr>
-        <p:spPr/>
-      </p:sp>
-    </p:spTree>
-  </p:cSld>
-  <p:clrMapOvr>
-    <a:masterClrMapping/>
-  </p:clrMapOvr>
-</p:notes>
 </file>
 
 <file path=ppt/slideLayouts/slideLayout1.xml><?xml version="1.0" encoding="utf-8"?>

--- a/curso/pptx/S19.pptx
+++ b/curso/pptx/S19.pptx
@@ -4028,7 +4028,7 @@
                 </a:solidFill>
                 <a:latin typeface="Fredoka"/>
               </a:rPr>
-              <a:t>Caso 2 · Un curso entero</a:t>
+              <a:t>Caso 2 · Un equipo entero</a:t>
             </a:r>
           </a:p>
         </p:txBody>
@@ -4110,7 +4110,7 @@
                 </a:solidFill>
                 <a:latin typeface="Nunito Sans"/>
               </a:rPr>
-              <a:t>Chen: «Un chico de 1.º me empujó ayer en el pasillo. Los de 1.º son todos unos maleducados».</a:t>
+              <a:t>Una chica: «Un chico de otro equipo me empujó en el partido. Los de ese equipo son todos unos brutos».</a:t>
             </a:r>
           </a:p>
         </p:txBody>
@@ -4183,7 +4183,7 @@
                 </a:solidFill>
                 <a:latin typeface="Nunito Sans"/>
               </a:rPr>
-              <a:t>¿Cuántos alumnos hay en 1.º? Muchos: uno no los representa.</a:t>
+              <a:t>¿Cuántos jugadores hay en ese equipo? Muchos: uno no los representa.</a:t>
             </a:r>
           </a:p>
           <a:p>
@@ -4728,7 +4728,7 @@
                 </a:solidFill>
                 <a:latin typeface="Nunito Sans"/>
               </a:rPr>
-              <a:t>Maialen prueba una cucharada de la sopa y dice: «Esta sopa está salada». Solo ha mirado un caso.</a:t>
+              <a:t>Una chica prueba una cucharada de la sopa y dice: «Esta sopa está salada». Solo ha mirado un caso.</a:t>
             </a:r>
           </a:p>
         </p:txBody>

--- a/curso/pptx/S19.pptx
+++ b/curso/pptx/S19.pptx
@@ -23,7 +23,6 @@
     <p:sldId id="271" r:id="rId23"/>
     <p:sldId id="272" r:id="rId24"/>
     <p:sldId id="273" r:id="rId25"/>
-    <p:sldId id="274" r:id="rId26"/>
   </p:sldIdLst>
   <p:sldSz cx="12192000" cy="6858000" type="screen4x3"/>
   <p:notesSz cx="6858000" cy="9144000"/>
@@ -3537,7 +3536,7 @@
                 </a:solidFill>
                 <a:latin typeface="Nunito Sans"/>
               </a:rPr>
-              <a:t>PENSAMIENTO CRÍTICO · SESIÓN 19 · UNIDAD 4 · FALACIAS II: RAZONAR MAL</a:t>
+              <a:t>PENSAMIENTO CRÍTICO · SESIÓN 19 · UNIDAD 4 · FALACIAS I: ATACAR, DESVIAR, EMOCIONAR</a:t>
             </a:r>
           </a:p>
         </p:txBody>
@@ -3576,7 +3575,7 @@
                 </a:solidFill>
                 <a:latin typeface="Fredoka"/>
               </a:rPr>
-              <a:t>Generalización apresurada</a:t>
+              <a:t>¿Qué es una falacia?</a:t>
             </a:r>
           </a:p>
         </p:txBody>
@@ -3615,7 +3614,7 @@
                 </a:solidFill>
                 <a:latin typeface="Nunito Sans"/>
               </a:rPr>
-              <a:t>La generalización apresurada saca una conclusión sobre todos a partir de pocos casos que no bastan.</a:t>
+              <a:t>Una falacia es un argumento que parece bueno pero no lo es: sus razones no sostienen la conclusión.</a:t>
             </a:r>
           </a:p>
         </p:txBody>
@@ -3719,7 +3718,7 @@
                 </a:solidFill>
                 <a:latin typeface="Fredoka"/>
               </a:rPr>
-              <a:t>Caso 1 · Las zapatillas</a:t>
+              <a:t>Caso 1 · El batido del principio</a:t>
             </a:r>
           </a:p>
         </p:txBody>
@@ -3801,7 +3800,7 @@
                 </a:solidFill>
                 <a:latin typeface="Nunito Sans"/>
               </a:rPr>
-              <a:t>«Mi primo compró unas zapatillas por internet y le llegaron rotas. Comprar por internet es siempre una estafa.»</a:t>
+              <a:t>«Este batido es el mejor. Lo toma el futbolista más famoso de la liga y lo compra todo el mundo.»</a:t>
             </a:r>
           </a:p>
         </p:txBody>
@@ -3849,7 +3848,7 @@
                 </a:solidFill>
                 <a:latin typeface="Nunito Sans"/>
               </a:rPr>
-              <a:t>¿Cuál es la conclusión? Comprar por internet es siempre una estafa.</a:t>
+              <a:t>¿Qué me piden creer? Que el batido es el mejor.</a:t>
             </a:r>
           </a:p>
           <a:p>
@@ -3874,7 +3873,7 @@
                 </a:solidFill>
                 <a:latin typeface="Nunito Sans"/>
               </a:rPr>
-              <a:t>¿Cuántos casos hay? Uno: el del primo.</a:t>
+              <a:t>¿Qué razones me dan? Lo toma un futbolista y lo compra mucha gente.</a:t>
             </a:r>
           </a:p>
           <a:p>
@@ -3899,7 +3898,7 @@
                 </a:solidFill>
                 <a:latin typeface="Nunito Sans"/>
               </a:rPr>
-              <a:t>¿Es suficiente? No: cada día hay muchísimas compras por internet, y la mayoría llegan bien.</a:t>
+              <a:t>¿Bastan? No: un futbolista no tiene por qué saber de nutrición, y venderse mucho no lo hace el mejor.</a:t>
             </a:r>
           </a:p>
           <a:p>
@@ -3924,7 +3923,7 @@
                 </a:solidFill>
                 <a:latin typeface="Nunito Sans"/>
               </a:rPr>
-              <a:t>Conclusión: generalización apresurada. Lo justo sería: «a veces falla; conviene mirar bien la tienda».</a:t>
+              <a:t>Conclusión: parece un argumento, pero es una falacia. Sigo sin saber nada del batido.</a:t>
             </a:r>
           </a:p>
         </p:txBody>
@@ -4028,7 +4027,7 @@
                 </a:solidFill>
                 <a:latin typeface="Fredoka"/>
               </a:rPr>
-              <a:t>Caso 2 · Un equipo entero</a:t>
+              <a:t>Caso 2 · Un argumento que sí es bueno</a:t>
             </a:r>
           </a:p>
         </p:txBody>
@@ -4110,7 +4109,7 @@
                 </a:solidFill>
                 <a:latin typeface="Nunito Sans"/>
               </a:rPr>
-              <a:t>Una chica: «Un chico de otro equipo me empujó en el partido. Los de ese equipo son todos unos brutos».</a:t>
+              <a:t>Una chica: «Hoy me llevo el paraguas porque la app del tiempo da un 90 % de lluvia y el cielo está negro.»</a:t>
             </a:r>
           </a:p>
         </p:txBody>
@@ -4158,7 +4157,7 @@
                 </a:solidFill>
                 <a:latin typeface="Nunito Sans"/>
               </a:rPr>
-              <a:t>¿Cuántos casos? Uno.</a:t>
+              <a:t>¿Es verdad? Se puede comprobar en la app y mirando al cielo.</a:t>
             </a:r>
           </a:p>
           <a:p>
@@ -4183,7 +4182,7 @@
                 </a:solidFill>
                 <a:latin typeface="Nunito Sans"/>
               </a:rPr>
-              <a:t>¿Cuántos jugadores hay en ese equipo? Muchos: uno no los representa.</a:t>
+              <a:t>¿Viene a cuento? Sí: las dos razones hablan de si va a llover.</a:t>
             </a:r>
           </a:p>
           <a:p>
@@ -4208,7 +4207,7 @@
                 </a:solidFill>
                 <a:latin typeface="Nunito Sans"/>
               </a:rPr>
-              <a:t>¿Es justo? No: culpa a muchos por lo que hizo uno. Cada persona es distinta.</a:t>
+              <a:t>¿Es suficiente? Para llevar un paraguas, sí.</a:t>
             </a:r>
           </a:p>
           <a:p>
@@ -4233,7 +4232,7 @@
                 </a:solidFill>
                 <a:latin typeface="Nunito Sans"/>
               </a:rPr>
-              <a:t>Conclusión: generalización apresurada. Así empiezan los estereotipos.</a:t>
+              <a:t>Conclusión: no es una falacia. No todos los argumentos son trucos.</a:t>
             </a:r>
           </a:p>
         </p:txBody>
@@ -4247,6 +4246,110 @@
 </file>
 
 <file path=ppt/slides/slide12.xml><?xml version="1.0" encoding="utf-8"?>
+<p:sld xmlns:a="http://schemas.openxmlformats.org/drawingml/2006/main" xmlns:p="http://schemas.openxmlformats.org/presentationml/2006/main" xmlns:r="http://schemas.openxmlformats.org/officeDocument/2006/relationships">
+  <p:cSld>
+    <p:bg>
+      <p:bgPr>
+        <a:solidFill>
+          <a:srgbClr val="1F2A44"/>
+        </a:solidFill>
+        <a:effectLst/>
+      </p:bgPr>
+    </p:bg>
+    <p:spTree>
+      <p:nvGrpSpPr>
+        <p:cNvPr id="1" name=""/>
+        <p:cNvGrpSpPr/>
+        <p:nvPr/>
+      </p:nvGrpSpPr>
+      <p:grpSpPr/>
+      <p:sp>
+        <p:nvSpPr>
+          <p:cNvPr id="2" name="TextBox 1"/>
+          <p:cNvSpPr txBox="1"/>
+          <p:nvPr/>
+        </p:nvSpPr>
+        <p:spPr>
+          <a:xfrm>
+            <a:off x="640000" y="2300000"/>
+            <a:ext cx="10912000" cy="500000"/>
+          </a:xfrm>
+          <a:prstGeom prst="rect">
+            <a:avLst/>
+          </a:prstGeom>
+          <a:noFill/>
+        </p:spPr>
+        <p:txBody>
+          <a:bodyPr wrap="square">
+            <a:spAutoFit/>
+          </a:bodyPr>
+          <a:lstStyle/>
+          <a:p>
+            <a:pPr>
+              <a:spcAft>
+                <a:spcPts val="810"/>
+              </a:spcAft>
+            </a:pPr>
+            <a:r>
+              <a:rPr sz="1800" b="1">
+                <a:solidFill>
+                  <a:srgbClr val="F4B183"/>
+                </a:solidFill>
+                <a:latin typeface="Nunito Sans"/>
+              </a:rPr>
+              <a:t>BLOQUE 3</a:t>
+            </a:r>
+          </a:p>
+        </p:txBody>
+      </p:sp>
+      <p:sp>
+        <p:nvSpPr>
+          <p:cNvPr id="3" name="TextBox 2"/>
+          <p:cNvSpPr txBox="1"/>
+          <p:nvPr/>
+        </p:nvSpPr>
+        <p:spPr>
+          <a:xfrm>
+            <a:off x="640000" y="2800000"/>
+            <a:ext cx="10912000" cy="800000"/>
+          </a:xfrm>
+          <a:prstGeom prst="rect">
+            <a:avLst/>
+          </a:prstGeom>
+          <a:noFill/>
+        </p:spPr>
+        <p:txBody>
+          <a:bodyPr wrap="square">
+            <a:spAutoFit/>
+          </a:bodyPr>
+          <a:lstStyle/>
+          <a:p>
+            <a:pPr>
+              <a:spcAft>
+                <a:spcPts val="2160"/>
+              </a:spcAft>
+            </a:pPr>
+            <a:r>
+              <a:rPr sz="4800" b="1">
+                <a:solidFill>
+                  <a:srgbClr val="FBF7EF"/>
+                </a:solidFill>
+                <a:latin typeface="Fredoka"/>
+              </a:rPr>
+              <a:t>Ojo</a:t>
+            </a:r>
+          </a:p>
+        </p:txBody>
+      </p:sp>
+    </p:spTree>
+  </p:cSld>
+  <p:clrMapOvr>
+    <a:masterClrMapping/>
+  </p:clrMapOvr>
+</p:sld>
+</file>
+
+<file path=ppt/slides/slide13.xml><?xml version="1.0" encoding="utf-8"?>
 <p:sld xmlns:a="http://schemas.openxmlformats.org/drawingml/2006/main" xmlns:p="http://schemas.openxmlformats.org/presentationml/2006/main" xmlns:r="http://schemas.openxmlformats.org/officeDocument/2006/relationships">
   <p:cSld>
     <p:bg>
@@ -4298,7 +4401,7 @@
                 </a:solidFill>
                 <a:latin typeface="Nunito Sans"/>
               </a:rPr>
-              <a:t>BLOQUE 2 · CASOS RESUELTOS</a:t>
+              <a:t>BLOQUE 3 · OJO</a:t>
             </a:r>
           </a:p>
         </p:txBody>
@@ -4337,64 +4440,21 @@
                 </a:solidFill>
                 <a:latin typeface="Fredoka"/>
               </a:rPr>
-              <a:t>Caso 3 · Cuando sí se puede generalizar</a:t>
-            </a:r>
-          </a:p>
-        </p:txBody>
-      </p:sp>
-      <p:sp>
-        <p:nvSpPr>
-          <p:cNvPr id="4" name="Rectangle 3"/>
-          <p:cNvSpPr/>
-          <p:nvPr/>
-        </p:nvSpPr>
-        <p:spPr>
-          <a:xfrm>
-            <a:off x="640000" y="1600000"/>
-            <a:ext cx="10912000" cy="1100000"/>
-          </a:xfrm>
-          <a:prstGeom prst="rect">
-            <a:avLst/>
-          </a:prstGeom>
-          <a:solidFill>
-            <a:srgbClr val="FFFFFF"/>
-          </a:solidFill>
-          <a:ln>
-            <a:noFill/>
-          </a:ln>
-        </p:spPr>
-        <p:style>
-          <a:lnRef idx="1">
-            <a:schemeClr val="accent1"/>
-          </a:lnRef>
-          <a:fillRef idx="3">
-            <a:schemeClr val="accent1"/>
-          </a:fillRef>
-          <a:effectRef idx="2">
-            <a:schemeClr val="accent1"/>
-          </a:effectRef>
-          <a:fontRef idx="minor">
-            <a:schemeClr val="lt1"/>
-          </a:fontRef>
-        </p:style>
-        <p:txBody>
-          <a:bodyPr rtlCol="0" anchor="ctr"/>
-          <a:lstStyle/>
-          <a:p>
-            <a:pPr algn="ctr"/>
-          </a:p>
-        </p:txBody>
-      </p:sp>
-      <p:sp>
-        <p:nvSpPr>
-          <p:cNvPr id="5" name="TextBox 4"/>
+              <a:t>Tres ideas para no liarse</a:t>
+            </a:r>
+          </a:p>
+        </p:txBody>
+      </p:sp>
+      <p:sp>
+        <p:nvSpPr>
+          <p:cNvPr id="4" name="TextBox 3"/>
           <p:cNvSpPr txBox="1"/>
           <p:nvPr/>
         </p:nvSpPr>
         <p:spPr>
           <a:xfrm>
-            <a:off x="840000" y="1650000"/>
-            <a:ext cx="10512000" cy="1000000"/>
+            <a:off x="640000" y="1650000"/>
+            <a:ext cx="10912000" cy="4808000"/>
           </a:xfrm>
           <a:prstGeom prst="rect">
             <a:avLst/>
@@ -4402,45 +4462,6 @@
           <a:noFill/>
         </p:spPr>
         <p:txBody>
-          <a:bodyPr wrap="square" anchor="ctr">
-            <a:spAutoFit/>
-          </a:bodyPr>
-          <a:lstStyle/>
-          <a:p>
-            <a:pPr>
-              <a:spcAft>
-                <a:spcPts val="1170"/>
-              </a:spcAft>
-            </a:pPr>
-            <a:r>
-              <a:rPr sz="2600" b="1">
-                <a:solidFill>
-                  <a:srgbClr val="1F2A44"/>
-                </a:solidFill>
-                <a:latin typeface="Nunito Sans"/>
-              </a:rPr>
-              <a:t>Imagina una encuesta a 500 alumnos de 20 institutos de Bizkaia. El 80 % dice que usa el móvil para estudiar (datos inventados).</a:t>
-            </a:r>
-          </a:p>
-        </p:txBody>
-      </p:sp>
-      <p:sp>
-        <p:nvSpPr>
-          <p:cNvPr id="6" name="TextBox 5"/>
-          <p:cNvSpPr txBox="1"/>
-          <p:nvPr/>
-        </p:nvSpPr>
-        <p:spPr>
-          <a:xfrm>
-            <a:off x="640000" y="2900000"/>
-            <a:ext cx="10912000" cy="3500000"/>
-          </a:xfrm>
-          <a:prstGeom prst="rect">
-            <a:avLst/>
-          </a:prstGeom>
-          <a:noFill/>
-        </p:spPr>
-        <p:txBody>
           <a:bodyPr wrap="square">
             <a:spAutoFit/>
           </a:bodyPr>
@@ -4448,101 +4469,148 @@
           <a:p>
             <a:pPr>
               <a:spcAft>
-                <a:spcPts val="1080"/>
-              </a:spcAft>
-            </a:pPr>
-            <a:r>
-              <a:rPr sz="2400" b="1">
+                <a:spcPts val="1260"/>
+              </a:spcAft>
+            </a:pPr>
+            <a:r>
+              <a:rPr sz="2800" b="1">
                 <a:solidFill>
                   <a:srgbClr val="E8793A"/>
                 </a:solidFill>
                 <a:latin typeface="Nunito Sans"/>
               </a:rPr>
-              <a:t>1. </a:t>
-            </a:r>
-            <a:r>
-              <a:rPr sz="2400" b="0">
+              <a:t>• </a:t>
+            </a:r>
+            <a:r>
+              <a:rPr sz="2800" b="0">
                 <a:solidFill>
                   <a:srgbClr val="1F2A44"/>
                 </a:solidFill>
                 <a:latin typeface="Nunito Sans"/>
               </a:rPr>
-              <a:t>¿Cuántos casos? Muchos: 500.</a:t>
-            </a:r>
-          </a:p>
-          <a:p>
-            <a:pPr>
-              <a:spcAft>
-                <a:spcPts val="1080"/>
-              </a:spcAft>
-            </a:pPr>
-            <a:r>
-              <a:rPr sz="2400" b="1">
+              <a:t>Una falacia puede tener una </a:t>
+            </a:r>
+            <a:r>
+              <a:rPr sz="2800" b="1">
+                <a:solidFill>
+                  <a:srgbClr val="1F2A44"/>
+                </a:solidFill>
+                <a:latin typeface="Nunito Sans"/>
+              </a:rPr>
+              <a:t>conclusión verdadera</a:t>
+            </a:r>
+            <a:r>
+              <a:rPr sz="2800" b="0">
+                <a:solidFill>
+                  <a:srgbClr val="1F2A44"/>
+                </a:solidFill>
+                <a:latin typeface="Nunito Sans"/>
+              </a:rPr>
+              <a:t>: falla el camino, no el final.</a:t>
+            </a:r>
+          </a:p>
+          <a:p>
+            <a:pPr>
+              <a:spcAft>
+                <a:spcPts val="1260"/>
+              </a:spcAft>
+            </a:pPr>
+            <a:r>
+              <a:rPr sz="2800" b="1">
                 <a:solidFill>
                   <a:srgbClr val="E8793A"/>
                 </a:solidFill>
                 <a:latin typeface="Nunito Sans"/>
               </a:rPr>
-              <a:t>2. </a:t>
-            </a:r>
-            <a:r>
-              <a:rPr sz="2400" b="0">
+              <a:t>• </a:t>
+            </a:r>
+            <a:r>
+              <a:rPr sz="2800" b="0">
                 <a:solidFill>
                   <a:srgbClr val="1F2A44"/>
                 </a:solidFill>
                 <a:latin typeface="Nunito Sans"/>
               </a:rPr>
-              <a:t>¿Son variados? Sí: de 20 institutos distintos.</a:t>
-            </a:r>
-          </a:p>
-          <a:p>
-            <a:pPr>
-              <a:spcAft>
-                <a:spcPts val="1080"/>
-              </a:spcAft>
-            </a:pPr>
-            <a:r>
-              <a:rPr sz="2400" b="1">
+              <a:t>Una frase falsa no es una falacia: es solo un error.</a:t>
+            </a:r>
+          </a:p>
+          <a:p>
+            <a:pPr>
+              <a:spcAft>
+                <a:spcPts val="1260"/>
+              </a:spcAft>
+            </a:pPr>
+            <a:r>
+              <a:rPr sz="2800" b="1">
                 <a:solidFill>
                   <a:srgbClr val="E8793A"/>
                 </a:solidFill>
                 <a:latin typeface="Nunito Sans"/>
               </a:rPr>
-              <a:t>3. </a:t>
-            </a:r>
-            <a:r>
-              <a:rPr sz="2400" b="0">
+              <a:t>• </a:t>
+            </a:r>
+            <a:r>
+              <a:rPr sz="2800" b="0">
                 <a:solidFill>
                   <a:srgbClr val="1F2A44"/>
                 </a:solidFill>
                 <a:latin typeface="Nunito Sans"/>
               </a:rPr>
-              <a:t>¿Es suficiente? Para decir «la mayoría», sí; para decir «todos», no. Y no dice nada de cada alumno.</a:t>
-            </a:r>
-          </a:p>
-          <a:p>
-            <a:pPr>
-              <a:spcAft>
-                <a:spcPts val="1080"/>
-              </a:spcAft>
-            </a:pPr>
-            <a:r>
-              <a:rPr sz="2400" b="1">
-                <a:solidFill>
-                  <a:srgbClr val="E8793A"/>
-                </a:solidFill>
-                <a:latin typeface="Nunito Sans"/>
-              </a:rPr>
-              <a:t>4. </a:t>
-            </a:r>
-            <a:r>
-              <a:rPr sz="2400" b="0">
+              <a:t>En esta unidad: falacias que </a:t>
+            </a:r>
+            <a:r>
+              <a:rPr sz="2800" b="1">
                 <a:solidFill>
                   <a:srgbClr val="1F2A44"/>
                 </a:solidFill>
                 <a:latin typeface="Nunito Sans"/>
               </a:rPr>
-              <a:t>Conclusión: no es falacia. Generalizar con muchos casos variados es una inducción bien hecha (sesión 10).</a:t>
+              <a:t>atacan</a:t>
+            </a:r>
+            <a:r>
+              <a:rPr sz="2800" b="0">
+                <a:solidFill>
+                  <a:srgbClr val="1F2A44"/>
+                </a:solidFill>
+                <a:latin typeface="Nunito Sans"/>
+              </a:rPr>
+              <a:t>, </a:t>
+            </a:r>
+            <a:r>
+              <a:rPr sz="2800" b="1">
+                <a:solidFill>
+                  <a:srgbClr val="1F2A44"/>
+                </a:solidFill>
+                <a:latin typeface="Nunito Sans"/>
+              </a:rPr>
+              <a:t>desvían</a:t>
+            </a:r>
+            <a:r>
+              <a:rPr sz="2800" b="0">
+                <a:solidFill>
+                  <a:srgbClr val="1F2A44"/>
+                </a:solidFill>
+                <a:latin typeface="Nunito Sans"/>
+              </a:rPr>
+              <a:t> o </a:t>
+            </a:r>
+            <a:r>
+              <a:rPr sz="2800" b="1">
+                <a:solidFill>
+                  <a:srgbClr val="1F2A44"/>
+                </a:solidFill>
+                <a:latin typeface="Nunito Sans"/>
+              </a:rPr>
+              <a:t>emocionan</a:t>
+            </a:r>
+            <a:r>
+              <a:rPr sz="2800" b="0">
+                <a:solidFill>
+                  <a:srgbClr val="1F2A44"/>
+                </a:solidFill>
+                <a:latin typeface="Nunito Sans"/>
+              </a:rPr>
+              <a:t>.</a:t>
             </a:r>
           </a:p>
         </p:txBody>
@@ -4555,7 +4623,7 @@
 </p:sld>
 </file>
 
-<file path=ppt/slides/slide13.xml><?xml version="1.0" encoding="utf-8"?>
+<file path=ppt/slides/slide14.xml><?xml version="1.0" encoding="utf-8"?>
 <p:sld xmlns:a="http://schemas.openxmlformats.org/drawingml/2006/main" xmlns:p="http://schemas.openxmlformats.org/presentationml/2006/main" xmlns:r="http://schemas.openxmlformats.org/officeDocument/2006/relationships">
   <p:cSld>
     <p:bg>
@@ -4607,7 +4675,7 @@
                 </a:solidFill>
                 <a:latin typeface="Nunito Sans"/>
               </a:rPr>
-              <a:t>CASO TRAMPA · BLOQUE 2 · CASOS RESUELTOS</a:t>
+              <a:t>CASO TRAMPA · BLOQUE 3 · OJO</a:t>
             </a:r>
           </a:p>
         </p:txBody>
@@ -4646,7 +4714,7 @@
                 </a:solidFill>
                 <a:latin typeface="Fredoka"/>
               </a:rPr>
-              <a:t>⚠ Una sola cucharada</a:t>
+              <a:t>⚠ Conclusión verdadera, ¿argumento bueno?</a:t>
             </a:r>
           </a:p>
         </p:txBody>
@@ -4728,7 +4796,7 @@
                 </a:solidFill>
                 <a:latin typeface="Nunito Sans"/>
               </a:rPr>
-              <a:t>Una chica prueba una cucharada de la sopa y dice: «Esta sopa está salada». Solo ha mirado un caso.</a:t>
+              <a:t>Un chico: «Fumar es malo para la salud. Lo sé porque lo dice mi youtuber de videojuegos favorito».</a:t>
             </a:r>
           </a:p>
         </p:txBody>
@@ -4776,7 +4844,7 @@
                 </a:solidFill>
                 <a:latin typeface="Nunito Sans"/>
               </a:rPr>
-              <a:t>Un caso para hablar de toda la sopa… ¿generalización apresurada?</a:t>
+              <a:t>Lo que dice es verdad. ¿Entonces su argumento es bueno?</a:t>
             </a:r>
           </a:p>
           <a:p>
@@ -4801,7 +4869,7 @@
                 </a:solidFill>
                 <a:latin typeface="Nunito Sans"/>
               </a:rPr>
-              <a:t>Parece que sí: saca una conclusión sobre toda la sopa con una sola cucharada.</a:t>
+              <a:t>La conclusión es verdad: la medicina lo ha comprobado muchísimas veces.</a:t>
             </a:r>
           </a:p>
           <a:p>
@@ -4826,7 +4894,7 @@
                 </a:solidFill>
                 <a:latin typeface="Nunito Sans"/>
               </a:rPr>
-              <a:t>Pero la sopa está mezclada: todas las cucharadas son casi iguales.</a:t>
+              <a:t>Pero su razón es otra: un youtuber de videojuegos, que no tiene por qué saber de salud.</a:t>
             </a:r>
           </a:p>
           <a:p>
@@ -4851,7 +4919,7 @@
                 </a:solidFill>
                 <a:latin typeface="Nunito Sans"/>
               </a:rPr>
-              <a:t>Con personas, tiendas o partidos no pasa eso: cada caso puede ser muy distinto.</a:t>
+              <a:t>¿Basta esa razón? No: la conclusión es verdad, pero no gracias a ella.</a:t>
             </a:r>
           </a:p>
           <a:p>
@@ -4876,129 +4944,7 @@
                 </a:solidFill>
                 <a:latin typeface="Nunito Sans"/>
               </a:rPr>
-              <a:t>Conclusión: no es falacia. Cuántos casos hacen falta depende de lo </a:t>
-            </a:r>
-            <a:r>
-              <a:rPr sz="2400" b="1">
-                <a:solidFill>
-                  <a:srgbClr val="1F2A44"/>
-                </a:solidFill>
-                <a:latin typeface="Nunito Sans"/>
-              </a:rPr>
-              <a:t>variadas</a:t>
-            </a:r>
-            <a:r>
-              <a:rPr sz="2400" b="0">
-                <a:solidFill>
-                  <a:srgbClr val="1F2A44"/>
-                </a:solidFill>
-                <a:latin typeface="Nunito Sans"/>
-              </a:rPr>
-              <a:t> que sean las cosas.</a:t>
-            </a:r>
-          </a:p>
-        </p:txBody>
-      </p:sp>
-    </p:spTree>
-  </p:cSld>
-  <p:clrMapOvr>
-    <a:masterClrMapping/>
-  </p:clrMapOvr>
-</p:sld>
-</file>
-
-<file path=ppt/slides/slide14.xml><?xml version="1.0" encoding="utf-8"?>
-<p:sld xmlns:a="http://schemas.openxmlformats.org/drawingml/2006/main" xmlns:p="http://schemas.openxmlformats.org/presentationml/2006/main" xmlns:r="http://schemas.openxmlformats.org/officeDocument/2006/relationships">
-  <p:cSld>
-    <p:bg>
-      <p:bgPr>
-        <a:solidFill>
-          <a:srgbClr val="1F2A44"/>
-        </a:solidFill>
-        <a:effectLst/>
-      </p:bgPr>
-    </p:bg>
-    <p:spTree>
-      <p:nvGrpSpPr>
-        <p:cNvPr id="1" name=""/>
-        <p:cNvGrpSpPr/>
-        <p:nvPr/>
-      </p:nvGrpSpPr>
-      <p:grpSpPr/>
-      <p:sp>
-        <p:nvSpPr>
-          <p:cNvPr id="2" name="TextBox 1"/>
-          <p:cNvSpPr txBox="1"/>
-          <p:nvPr/>
-        </p:nvSpPr>
-        <p:spPr>
-          <a:xfrm>
-            <a:off x="640000" y="2300000"/>
-            <a:ext cx="10912000" cy="500000"/>
-          </a:xfrm>
-          <a:prstGeom prst="rect">
-            <a:avLst/>
-          </a:prstGeom>
-          <a:noFill/>
-        </p:spPr>
-        <p:txBody>
-          <a:bodyPr wrap="square">
-            <a:spAutoFit/>
-          </a:bodyPr>
-          <a:lstStyle/>
-          <a:p>
-            <a:pPr>
-              <a:spcAft>
-                <a:spcPts val="810"/>
-              </a:spcAft>
-            </a:pPr>
-            <a:r>
-              <a:rPr sz="1800" b="1">
-                <a:solidFill>
-                  <a:srgbClr val="F4B183"/>
-                </a:solidFill>
-                <a:latin typeface="Nunito Sans"/>
-              </a:rPr>
-              <a:t>BLOQUE 3</a:t>
-            </a:r>
-          </a:p>
-        </p:txBody>
-      </p:sp>
-      <p:sp>
-        <p:nvSpPr>
-          <p:cNvPr id="3" name="TextBox 2"/>
-          <p:cNvSpPr txBox="1"/>
-          <p:nvPr/>
-        </p:nvSpPr>
-        <p:spPr>
-          <a:xfrm>
-            <a:off x="640000" y="2800000"/>
-            <a:ext cx="10912000" cy="800000"/>
-          </a:xfrm>
-          <a:prstGeom prst="rect">
-            <a:avLst/>
-          </a:prstGeom>
-          <a:noFill/>
-        </p:spPr>
-        <p:txBody>
-          <a:bodyPr wrap="square">
-            <a:spAutoFit/>
-          </a:bodyPr>
-          <a:lstStyle/>
-          <a:p>
-            <a:pPr>
-              <a:spcAft>
-                <a:spcPts val="2160"/>
-              </a:spcAft>
-            </a:pPr>
-            <a:r>
-              <a:rPr sz="4800" b="1">
-                <a:solidFill>
-                  <a:srgbClr val="FBF7EF"/>
-                </a:solidFill>
-                <a:latin typeface="Fredoka"/>
-              </a:rPr>
-              <a:t>Generalizar bien y mal</a:t>
+              <a:t>Conclusión: una conclusión verdadera no hace bueno el argumento. Mira el camino, no solo el final.</a:t>
             </a:r>
           </a:p>
         </p:txBody>
@@ -5063,7 +5009,7 @@
                 </a:solidFill>
                 <a:latin typeface="Nunito Sans"/>
               </a:rPr>
-              <a:t>BLOQUE 3 · GENERALIZAR BIEN Y MAL</a:t>
+              <a:t>LO DE HOY EN TRES LÍNEAS</a:t>
             </a:r>
           </a:p>
         </p:txBody>
@@ -5102,64 +5048,21 @@
                 </a:solidFill>
                 <a:latin typeface="Fredoka"/>
               </a:rPr>
-              <a:t>¿Apresurada o bien hecha?</a:t>
-            </a:r>
-          </a:p>
-        </p:txBody>
-      </p:sp>
-      <p:sp>
-        <p:nvSpPr>
-          <p:cNvPr id="4" name="Rectangle 3"/>
-          <p:cNvSpPr/>
-          <p:nvPr/>
-        </p:nvSpPr>
-        <p:spPr>
-          <a:xfrm>
-            <a:off x="640000" y="1650000"/>
-            <a:ext cx="5306000" cy="4400000"/>
-          </a:xfrm>
-          <a:prstGeom prst="rect">
-            <a:avLst/>
-          </a:prstGeom>
-          <a:solidFill>
-            <a:srgbClr val="FBE3D2"/>
-          </a:solidFill>
-          <a:ln>
-            <a:noFill/>
-          </a:ln>
-        </p:spPr>
-        <p:style>
-          <a:lnRef idx="1">
-            <a:schemeClr val="accent1"/>
-          </a:lnRef>
-          <a:fillRef idx="3">
-            <a:schemeClr val="accent1"/>
-          </a:fillRef>
-          <a:effectRef idx="2">
-            <a:schemeClr val="accent1"/>
-          </a:effectRef>
-          <a:fontRef idx="minor">
-            <a:schemeClr val="lt1"/>
-          </a:fontRef>
-        </p:style>
-        <p:txBody>
-          <a:bodyPr rtlCol="0" anchor="ctr"/>
-          <a:lstStyle/>
-          <a:p>
-            <a:pPr algn="ctr"/>
-          </a:p>
-        </p:txBody>
-      </p:sp>
-      <p:sp>
-        <p:nvSpPr>
-          <p:cNvPr id="5" name="TextBox 4"/>
+              <a:t>Escríbelo tú primero, sin mirar</a:t>
+            </a:r>
+          </a:p>
+        </p:txBody>
+      </p:sp>
+      <p:sp>
+        <p:nvSpPr>
+          <p:cNvPr id="4" name="TextBox 3"/>
           <p:cNvSpPr txBox="1"/>
           <p:nvPr/>
         </p:nvSpPr>
         <p:spPr>
           <a:xfrm>
-            <a:off x="840000" y="1750000"/>
-            <a:ext cx="4906000" cy="600000"/>
+            <a:off x="640000" y="1800000"/>
+            <a:ext cx="10912000" cy="1500000"/>
           </a:xfrm>
           <a:prstGeom prst="rect">
             <a:avLst/>
@@ -5174,295 +5077,17 @@
           <a:p>
             <a:pPr>
               <a:spcAft>
-                <a:spcPts val="1260"/>
-              </a:spcAft>
-            </a:pPr>
-            <a:r>
-              <a:rPr sz="2800" b="1">
-                <a:solidFill>
-                  <a:srgbClr val="C2531C"/>
-                </a:solidFill>
-                <a:latin typeface="Nunito Sans"/>
-              </a:rPr>
-              <a:t>Apresurada</a:t>
-            </a:r>
-          </a:p>
-        </p:txBody>
-      </p:sp>
-      <p:sp>
-        <p:nvSpPr>
-          <p:cNvPr id="6" name="TextBox 5"/>
-          <p:cNvSpPr txBox="1"/>
-          <p:nvPr/>
-        </p:nvSpPr>
-        <p:spPr>
-          <a:xfrm>
-            <a:off x="840000" y="2400000"/>
-            <a:ext cx="4906000" cy="3500000"/>
-          </a:xfrm>
-          <a:prstGeom prst="rect">
-            <a:avLst/>
-          </a:prstGeom>
-          <a:noFill/>
-        </p:spPr>
-        <p:txBody>
-          <a:bodyPr wrap="square">
-            <a:spAutoFit/>
-          </a:bodyPr>
-          <a:lstStyle/>
-          <a:p>
-            <a:pPr>
-              <a:spcAft>
                 <a:spcPts val="1170"/>
               </a:spcAft>
             </a:pPr>
             <a:r>
-              <a:rPr sz="2600" b="1">
-                <a:solidFill>
-                  <a:srgbClr val="E8793A"/>
-                </a:solidFill>
-                <a:latin typeface="Nunito Sans"/>
-              </a:rPr>
-              <a:t>• </a:t>
-            </a:r>
-            <a:r>
               <a:rPr sz="2600" b="0">
                 <a:solidFill>
-                  <a:srgbClr val="1F2A44"/>
-                </a:solidFill>
-                <a:latin typeface="Nunito Sans"/>
-              </a:rPr>
-              <a:t>Pocos casos, para cosas muy distintas entre sí</a:t>
-            </a:r>
-          </a:p>
-          <a:p>
-            <a:pPr>
-              <a:spcAft>
-                <a:spcPts val="1170"/>
-              </a:spcAft>
-            </a:pPr>
-            <a:r>
-              <a:rPr sz="2600" b="1">
-                <a:solidFill>
-                  <a:srgbClr val="E8793A"/>
-                </a:solidFill>
-                <a:latin typeface="Nunito Sans"/>
-              </a:rPr>
-              <a:t>• </a:t>
-            </a:r>
-            <a:r>
-              <a:rPr sz="2600" b="0">
-                <a:solidFill>
-                  <a:srgbClr val="1F2A44"/>
-                </a:solidFill>
-                <a:latin typeface="Nunito Sans"/>
-              </a:rPr>
-              <a:t>Casos muy parecidos o elegidos a propósito</a:t>
-            </a:r>
-          </a:p>
-          <a:p>
-            <a:pPr>
-              <a:spcAft>
-                <a:spcPts val="1170"/>
-              </a:spcAft>
-            </a:pPr>
-            <a:r>
-              <a:rPr sz="2600" b="1">
-                <a:solidFill>
-                  <a:srgbClr val="E8793A"/>
-                </a:solidFill>
-                <a:latin typeface="Nunito Sans"/>
-              </a:rPr>
-              <a:t>• </a:t>
-            </a:r>
-            <a:r>
-              <a:rPr sz="2600" b="0">
-                <a:solidFill>
-                  <a:srgbClr val="1F2A44"/>
-                </a:solidFill>
-                <a:latin typeface="Nunito Sans"/>
-              </a:rPr>
-              <a:t>Dice más de lo que muestran los casos</a:t>
-            </a:r>
-          </a:p>
-        </p:txBody>
-      </p:sp>
-      <p:sp>
-        <p:nvSpPr>
-          <p:cNvPr id="7" name="Rectangle 6"/>
-          <p:cNvSpPr/>
-          <p:nvPr/>
-        </p:nvSpPr>
-        <p:spPr>
-          <a:xfrm>
-            <a:off x="6246000" y="1650000"/>
-            <a:ext cx="5306000" cy="4400000"/>
-          </a:xfrm>
-          <a:prstGeom prst="rect">
-            <a:avLst/>
-          </a:prstGeom>
-          <a:solidFill>
-            <a:srgbClr val="EAF0F7"/>
-          </a:solidFill>
-          <a:ln>
-            <a:noFill/>
-          </a:ln>
-        </p:spPr>
-        <p:style>
-          <a:lnRef idx="1">
-            <a:schemeClr val="accent1"/>
-          </a:lnRef>
-          <a:fillRef idx="3">
-            <a:schemeClr val="accent1"/>
-          </a:fillRef>
-          <a:effectRef idx="2">
-            <a:schemeClr val="accent1"/>
-          </a:effectRef>
-          <a:fontRef idx="minor">
-            <a:schemeClr val="lt1"/>
-          </a:fontRef>
-        </p:style>
-        <p:txBody>
-          <a:bodyPr rtlCol="0" anchor="ctr"/>
-          <a:lstStyle/>
-          <a:p>
-            <a:pPr algn="ctr"/>
-          </a:p>
-        </p:txBody>
-      </p:sp>
-      <p:sp>
-        <p:nvSpPr>
-          <p:cNvPr id="8" name="TextBox 7"/>
-          <p:cNvSpPr txBox="1"/>
-          <p:nvPr/>
-        </p:nvSpPr>
-        <p:spPr>
-          <a:xfrm>
-            <a:off x="6446000" y="1750000"/>
-            <a:ext cx="4906000" cy="600000"/>
-          </a:xfrm>
-          <a:prstGeom prst="rect">
-            <a:avLst/>
-          </a:prstGeom>
-          <a:noFill/>
-        </p:spPr>
-        <p:txBody>
-          <a:bodyPr wrap="square">
-            <a:spAutoFit/>
-          </a:bodyPr>
-          <a:lstStyle/>
-          <a:p>
-            <a:pPr>
-              <a:spcAft>
-                <a:spcPts val="1260"/>
-              </a:spcAft>
-            </a:pPr>
-            <a:r>
-              <a:rPr sz="2800" b="1">
-                <a:solidFill>
-                  <a:srgbClr val="2F6FB5"/>
-                </a:solidFill>
-                <a:latin typeface="Nunito Sans"/>
-              </a:rPr>
-              <a:t>Bien hecha</a:t>
-            </a:r>
-          </a:p>
-        </p:txBody>
-      </p:sp>
-      <p:sp>
-        <p:nvSpPr>
-          <p:cNvPr id="9" name="TextBox 8"/>
-          <p:cNvSpPr txBox="1"/>
-          <p:nvPr/>
-        </p:nvSpPr>
-        <p:spPr>
-          <a:xfrm>
-            <a:off x="6446000" y="2400000"/>
-            <a:ext cx="4906000" cy="3500000"/>
-          </a:xfrm>
-          <a:prstGeom prst="rect">
-            <a:avLst/>
-          </a:prstGeom>
-          <a:noFill/>
-        </p:spPr>
-        <p:txBody>
-          <a:bodyPr wrap="square">
-            <a:spAutoFit/>
-          </a:bodyPr>
-          <a:lstStyle/>
-          <a:p>
-            <a:pPr>
-              <a:spcAft>
-                <a:spcPts val="1170"/>
-              </a:spcAft>
-            </a:pPr>
-            <a:r>
-              <a:rPr sz="2600" b="1">
-                <a:solidFill>
-                  <a:srgbClr val="E8793A"/>
-                </a:solidFill>
-                <a:latin typeface="Nunito Sans"/>
-              </a:rPr>
-              <a:t>• </a:t>
-            </a:r>
-            <a:r>
-              <a:rPr sz="2600" b="0">
-                <a:solidFill>
-                  <a:srgbClr val="1F2A44"/>
-                </a:solidFill>
-                <a:latin typeface="Nunito Sans"/>
-              </a:rPr>
-              <a:t>Casos suficientes para lo variadas que son las cosas</a:t>
-            </a:r>
-          </a:p>
-          <a:p>
-            <a:pPr>
-              <a:spcAft>
-                <a:spcPts val="1170"/>
-              </a:spcAft>
-            </a:pPr>
-            <a:r>
-              <a:rPr sz="2600" b="1">
-                <a:solidFill>
-                  <a:srgbClr val="E8793A"/>
-                </a:solidFill>
-                <a:latin typeface="Nunito Sans"/>
-              </a:rPr>
-              <a:t>• </a:t>
-            </a:r>
-            <a:r>
-              <a:rPr sz="2600" b="0">
-                <a:solidFill>
-                  <a:srgbClr val="1F2A44"/>
-                </a:solidFill>
-                <a:latin typeface="Nunito Sans"/>
-              </a:rPr>
-              <a:t>Casos variados</a:t>
-            </a:r>
-          </a:p>
-          <a:p>
-            <a:pPr>
-              <a:spcAft>
-                <a:spcPts val="1170"/>
-              </a:spcAft>
-            </a:pPr>
-            <a:r>
-              <a:rPr sz="2600" b="1">
-                <a:solidFill>
-                  <a:srgbClr val="E8793A"/>
-                </a:solidFill>
-                <a:latin typeface="Nunito Sans"/>
-              </a:rPr>
-              <a:t>• </a:t>
-            </a:r>
-            <a:r>
-              <a:rPr sz="2600" b="0">
-                <a:solidFill>
-                  <a:srgbClr val="1F2A44"/>
-                </a:solidFill>
-                <a:latin typeface="Nunito Sans"/>
-              </a:rPr>
-              <a:t>Dice solo lo que muestran: «la mayoría», «a menudo»</a:t>
+                  <a:srgbClr val="4A5568"/>
+                </a:solidFill>
+                <a:latin typeface="Nunito Sans"/>
+              </a:rPr>
+              <a:t>Dos minutos. Después lo comparamos.</a:t>
             </a:r>
           </a:p>
         </p:txBody>
@@ -5540,8 +5165,8 @@
         </p:nvSpPr>
         <p:spPr>
           <a:xfrm>
-            <a:off x="640000" y="760000"/>
-            <a:ext cx="10912000" cy="800000"/>
+            <a:off x="640000" y="1300000"/>
+            <a:ext cx="10912000" cy="4800000"/>
           </a:xfrm>
           <a:prstGeom prst="rect">
             <a:avLst/>
@@ -5556,56 +5181,76 @@
           <a:p>
             <a:pPr>
               <a:spcAft>
-                <a:spcPts val="1710"/>
-              </a:spcAft>
-            </a:pPr>
-            <a:r>
-              <a:rPr sz="3800" b="1">
+                <a:spcPts val="1350"/>
+              </a:spcAft>
+            </a:pPr>
+            <a:r>
+              <a:rPr sz="3000" b="1">
+                <a:solidFill>
+                  <a:srgbClr val="E8793A"/>
+                </a:solidFill>
+                <a:latin typeface="Nunito Sans"/>
+              </a:rPr>
+              <a:t>1. </a:t>
+            </a:r>
+            <a:r>
+              <a:rPr sz="3000" b="0">
                 <a:solidFill>
                   <a:srgbClr val="1F2A44"/>
                 </a:solidFill>
-                <a:latin typeface="Fredoka"/>
-              </a:rPr>
-              <a:t>Escríbelo tú primero, sin mirar</a:t>
-            </a:r>
-          </a:p>
-        </p:txBody>
-      </p:sp>
-      <p:sp>
-        <p:nvSpPr>
-          <p:cNvPr id="4" name="TextBox 3"/>
-          <p:cNvSpPr txBox="1"/>
-          <p:nvPr/>
-        </p:nvSpPr>
-        <p:spPr>
-          <a:xfrm>
-            <a:off x="640000" y="1800000"/>
-            <a:ext cx="10912000" cy="1500000"/>
-          </a:xfrm>
-          <a:prstGeom prst="rect">
-            <a:avLst/>
-          </a:prstGeom>
-          <a:noFill/>
-        </p:spPr>
-        <p:txBody>
-          <a:bodyPr wrap="square">
-            <a:spAutoFit/>
-          </a:bodyPr>
-          <a:lstStyle/>
-          <a:p>
-            <a:pPr>
-              <a:spcAft>
-                <a:spcPts val="1170"/>
-              </a:spcAft>
-            </a:pPr>
-            <a:r>
-              <a:rPr sz="2600" b="0">
-                <a:solidFill>
-                  <a:srgbClr val="4A5568"/>
-                </a:solidFill>
-                <a:latin typeface="Nunito Sans"/>
-              </a:rPr>
-              <a:t>Dos minutos. Después lo comparamos.</a:t>
+                <a:latin typeface="Nunito Sans"/>
+              </a:rPr>
+              <a:t>Una falacia es un argumento que parece bueno, pero no lo es.</a:t>
+            </a:r>
+          </a:p>
+          <a:p>
+            <a:pPr>
+              <a:spcAft>
+                <a:spcPts val="1350"/>
+              </a:spcAft>
+            </a:pPr>
+            <a:r>
+              <a:rPr sz="3000" b="1">
+                <a:solidFill>
+                  <a:srgbClr val="E8793A"/>
+                </a:solidFill>
+                <a:latin typeface="Nunito Sans"/>
+              </a:rPr>
+              <a:t>2. </a:t>
+            </a:r>
+            <a:r>
+              <a:rPr sz="3000" b="0">
+                <a:solidFill>
+                  <a:srgbClr val="1F2A44"/>
+                </a:solidFill>
+                <a:latin typeface="Nunito Sans"/>
+              </a:rPr>
+              <a:t>Casi siempre falla así: la razón no viene a cuento o no es suficiente.</a:t>
+            </a:r>
+          </a:p>
+          <a:p>
+            <a:pPr>
+              <a:spcAft>
+                <a:spcPts val="1350"/>
+              </a:spcAft>
+            </a:pPr>
+            <a:r>
+              <a:rPr sz="3000" b="1">
+                <a:solidFill>
+                  <a:srgbClr val="E8793A"/>
+                </a:solidFill>
+                <a:latin typeface="Nunito Sans"/>
+              </a:rPr>
+              <a:t>3. </a:t>
+            </a:r>
+            <a:r>
+              <a:rPr sz="3000" b="0">
+                <a:solidFill>
+                  <a:srgbClr val="1F2A44"/>
+                </a:solidFill>
+                <a:latin typeface="Nunito Sans"/>
+              </a:rPr>
+              <a:t>Una falacia puede tener una conclusión verdadera: lo que falla es el camino.</a:t>
             </a:r>
           </a:p>
         </p:txBody>
@@ -5624,7 +5269,7 @@
     <p:bg>
       <p:bgPr>
         <a:solidFill>
-          <a:srgbClr val="FBF7EF"/>
+          <a:srgbClr val="1F2A44"/>
         </a:solidFill>
         <a:effectLst/>
       </p:bgPr>
@@ -5666,11 +5311,11 @@
             <a:r>
               <a:rPr sz="1400" b="1">
                 <a:solidFill>
-                  <a:srgbClr val="E8793A"/>
-                </a:solidFill>
-                <a:latin typeface="Nunito Sans"/>
-              </a:rPr>
-              <a:t>LO DE HOY EN TRES LÍNEAS</a:t>
+                  <a:srgbClr val="F4B183"/>
+                </a:solidFill>
+                <a:latin typeface="Nunito Sans"/>
+              </a:rPr>
+              <a:t>VÍDEO</a:t>
             </a:r>
           </a:p>
         </p:txBody>
@@ -5683,8 +5328,8 @@
         </p:nvSpPr>
         <p:spPr>
           <a:xfrm>
-            <a:off x="640000" y="1300000"/>
-            <a:ext cx="10912000" cy="4800000"/>
+            <a:off x="640000" y="760000"/>
+            <a:ext cx="10912000" cy="800000"/>
           </a:xfrm>
           <a:prstGeom prst="rect">
             <a:avLst/>
@@ -5699,76 +5344,56 @@
           <a:p>
             <a:pPr>
               <a:spcAft>
-                <a:spcPts val="1350"/>
-              </a:spcAft>
-            </a:pPr>
-            <a:r>
-              <a:rPr sz="3000" b="1">
-                <a:solidFill>
-                  <a:srgbClr val="E8793A"/>
-                </a:solidFill>
-                <a:latin typeface="Nunito Sans"/>
-              </a:rPr>
-              <a:t>1. </a:t>
-            </a:r>
-            <a:r>
-              <a:rPr sz="3000" b="0">
-                <a:solidFill>
-                  <a:srgbClr val="1F2A44"/>
-                </a:solidFill>
-                <a:latin typeface="Nunito Sans"/>
-              </a:rPr>
-              <a:t>La generalización apresurada pasa de pocos casos que no bastan a «todos» o «siempre».</a:t>
-            </a:r>
-          </a:p>
-          <a:p>
-            <a:pPr>
-              <a:spcAft>
-                <a:spcPts val="1350"/>
-              </a:spcAft>
-            </a:pPr>
-            <a:r>
-              <a:rPr sz="3000" b="1">
-                <a:solidFill>
-                  <a:srgbClr val="E8793A"/>
-                </a:solidFill>
-                <a:latin typeface="Nunito Sans"/>
-              </a:rPr>
-              <a:t>2. </a:t>
-            </a:r>
-            <a:r>
-              <a:rPr sz="3000" b="0">
-                <a:solidFill>
-                  <a:srgbClr val="1F2A44"/>
-                </a:solidFill>
-                <a:latin typeface="Nunito Sans"/>
-              </a:rPr>
-              <a:t>Para desmontarla: ¿cuántos casos has mirado? ¿Son suficientes?</a:t>
-            </a:r>
-          </a:p>
-          <a:p>
-            <a:pPr>
-              <a:spcAft>
-                <a:spcPts val="1350"/>
-              </a:spcAft>
-            </a:pPr>
-            <a:r>
-              <a:rPr sz="3000" b="1">
-                <a:solidFill>
-                  <a:srgbClr val="E8793A"/>
-                </a:solidFill>
-                <a:latin typeface="Nunito Sans"/>
-              </a:rPr>
-              <a:t>3. </a:t>
-            </a:r>
-            <a:r>
-              <a:rPr sz="3000" b="0">
-                <a:solidFill>
-                  <a:srgbClr val="1F2A44"/>
-                </a:solidFill>
-                <a:latin typeface="Nunito Sans"/>
-              </a:rPr>
-              <a:t>Generalizar está bien con casos suficientes y variados, sin decir más de lo que muestran.</a:t>
+                <a:spcPts val="1620"/>
+              </a:spcAft>
+            </a:pPr>
+            <a:r>
+              <a:rPr sz="3600" b="1">
+                <a:solidFill>
+                  <a:srgbClr val="FBF7EF"/>
+                </a:solidFill>
+                <a:latin typeface="Fredoka"/>
+              </a:rPr>
+              <a:t>Qué es una falacia, explicado con ejemplos sencillos</a:t>
+            </a:r>
+          </a:p>
+        </p:txBody>
+      </p:sp>
+      <p:sp>
+        <p:nvSpPr>
+          <p:cNvPr id="4" name="TextBox 3"/>
+          <p:cNvSpPr txBox="1"/>
+          <p:nvPr/>
+        </p:nvSpPr>
+        <p:spPr>
+          <a:xfrm>
+            <a:off x="640000" y="2200000"/>
+            <a:ext cx="10912000" cy="2000000"/>
+          </a:xfrm>
+          <a:prstGeom prst="rect">
+            <a:avLst/>
+          </a:prstGeom>
+          <a:noFill/>
+        </p:spPr>
+        <p:txBody>
+          <a:bodyPr wrap="square">
+            <a:spAutoFit/>
+          </a:bodyPr>
+          <a:lstStyle/>
+          <a:p>
+            <a:pPr>
+              <a:spcAft>
+                <a:spcPts val="1080"/>
+              </a:spcAft>
+            </a:pPr>
+            <a:r>
+              <a:rPr sz="2400" b="0">
+                <a:solidFill>
+                  <a:srgbClr val="C9D3E6"/>
+                </a:solidFill>
+                <a:latin typeface="Nunito Sans"/>
+              </a:rPr>
+              <a:t>Oír la definición con otras palabras y ver ejemplos de la vida diaria.</a:t>
             </a:r>
           </a:p>
         </p:txBody>
@@ -5833,149 +5458,6 @@
                 </a:solidFill>
                 <a:latin typeface="Nunito Sans"/>
               </a:rPr>
-              <a:t>VÍDEO</a:t>
-            </a:r>
-          </a:p>
-        </p:txBody>
-      </p:sp>
-      <p:sp>
-        <p:nvSpPr>
-          <p:cNvPr id="3" name="TextBox 2"/>
-          <p:cNvSpPr txBox="1"/>
-          <p:nvPr/>
-        </p:nvSpPr>
-        <p:spPr>
-          <a:xfrm>
-            <a:off x="640000" y="760000"/>
-            <a:ext cx="10912000" cy="800000"/>
-          </a:xfrm>
-          <a:prstGeom prst="rect">
-            <a:avLst/>
-          </a:prstGeom>
-          <a:noFill/>
-        </p:spPr>
-        <p:txBody>
-          <a:bodyPr wrap="square">
-            <a:spAutoFit/>
-          </a:bodyPr>
-          <a:lstStyle/>
-          <a:p>
-            <a:pPr>
-              <a:spcAft>
-                <a:spcPts val="1620"/>
-              </a:spcAft>
-            </a:pPr>
-            <a:r>
-              <a:rPr sz="3600" b="1">
-                <a:solidFill>
-                  <a:srgbClr val="FBF7EF"/>
-                </a:solidFill>
-                <a:latin typeface="Fredoka"/>
-              </a:rPr>
-              <a:t>La generalización apresurada y los estereotipos</a:t>
-            </a:r>
-          </a:p>
-        </p:txBody>
-      </p:sp>
-      <p:sp>
-        <p:nvSpPr>
-          <p:cNvPr id="4" name="TextBox 3"/>
-          <p:cNvSpPr txBox="1"/>
-          <p:nvPr/>
-        </p:nvSpPr>
-        <p:spPr>
-          <a:xfrm>
-            <a:off x="640000" y="2200000"/>
-            <a:ext cx="10912000" cy="2000000"/>
-          </a:xfrm>
-          <a:prstGeom prst="rect">
-            <a:avLst/>
-          </a:prstGeom>
-          <a:noFill/>
-        </p:spPr>
-        <p:txBody>
-          <a:bodyPr wrap="square">
-            <a:spAutoFit/>
-          </a:bodyPr>
-          <a:lstStyle/>
-          <a:p>
-            <a:pPr>
-              <a:spcAft>
-                <a:spcPts val="1080"/>
-              </a:spcAft>
-            </a:pPr>
-            <a:r>
-              <a:rPr sz="2400" b="0">
-                <a:solidFill>
-                  <a:srgbClr val="C9D3E6"/>
-                </a:solidFill>
-                <a:latin typeface="Nunito Sans"/>
-              </a:rPr>
-              <a:t>Ver cómo de un caso se salta a «todos», también con grupos de personas.</a:t>
-            </a:r>
-          </a:p>
-        </p:txBody>
-      </p:sp>
-    </p:spTree>
-  </p:cSld>
-  <p:clrMapOvr>
-    <a:masterClrMapping/>
-  </p:clrMapOvr>
-</p:sld>
-</file>
-
-<file path=ppt/slides/slide19.xml><?xml version="1.0" encoding="utf-8"?>
-<p:sld xmlns:a="http://schemas.openxmlformats.org/drawingml/2006/main" xmlns:p="http://schemas.openxmlformats.org/presentationml/2006/main" xmlns:r="http://schemas.openxmlformats.org/officeDocument/2006/relationships">
-  <p:cSld>
-    <p:bg>
-      <p:bgPr>
-        <a:solidFill>
-          <a:srgbClr val="1F2A44"/>
-        </a:solidFill>
-        <a:effectLst/>
-      </p:bgPr>
-    </p:bg>
-    <p:spTree>
-      <p:nvGrpSpPr>
-        <p:cNvPr id="1" name=""/>
-        <p:cNvGrpSpPr/>
-        <p:nvPr/>
-      </p:nvGrpSpPr>
-      <p:grpSpPr/>
-      <p:sp>
-        <p:nvSpPr>
-          <p:cNvPr id="2" name="TextBox 1"/>
-          <p:cNvSpPr txBox="1"/>
-          <p:nvPr/>
-        </p:nvSpPr>
-        <p:spPr>
-          <a:xfrm>
-            <a:off x="640000" y="380000"/>
-            <a:ext cx="10912000" cy="420000"/>
-          </a:xfrm>
-          <a:prstGeom prst="rect">
-            <a:avLst/>
-          </a:prstGeom>
-          <a:noFill/>
-        </p:spPr>
-        <p:txBody>
-          <a:bodyPr wrap="square">
-            <a:spAutoFit/>
-          </a:bodyPr>
-          <a:lstStyle/>
-          <a:p>
-            <a:pPr>
-              <a:spcAft>
-                <a:spcPts val="630"/>
-              </a:spcAft>
-            </a:pPr>
-            <a:r>
-              <a:rPr sz="1400" b="1">
-                <a:solidFill>
-                  <a:srgbClr val="F4B183"/>
-                </a:solidFill>
-                <a:latin typeface="Nunito Sans"/>
-              </a:rPr>
               <a:t>AHORA, LA HOJA DEL DÍA</a:t>
             </a:r>
           </a:p>
@@ -6569,7 +6051,7 @@
                 </a:solidFill>
                 <a:latin typeface="Nunito Sans"/>
               </a:rPr>
-              <a:t>Si es un truco, ponle ______ y hazle su pregunta.  (sesión 18)</a:t>
+              <a:t>Una premisa ______ no se dice, pero hace falta.  (sesión 18)</a:t>
             </a:r>
           </a:p>
           <a:p>
@@ -6594,7 +6076,7 @@
                 </a:solidFill>
                 <a:latin typeface="Nunito Sans"/>
               </a:rPr>
-              <a:t>El hombre de paja ______ la idea del otro.  (sesión 18)</a:t>
+              <a:t>La conclusión de una inducción es ______: puede fallar.  (sesión 18)</a:t>
             </a:r>
           </a:p>
           <a:p>
@@ -6619,7 +6101,7 @@
                 </a:solidFill>
                 <a:latin typeface="Nunito Sans"/>
               </a:rPr>
-              <a:t>La conclusión no siempre va al ______.  (sesión 7)</a:t>
+              <a:t>El ______ es cuando casi todos los expertos de un tema están de acuerdo después de mirar las pruebas.  (sesión 7)</a:t>
             </a:r>
           </a:p>
         </p:txBody>
@@ -6771,7 +6253,7 @@
                 </a:solidFill>
                 <a:latin typeface="Nunito Sans"/>
               </a:rPr>
-              <a:t>Si es un truco, ponle </a:t>
+              <a:t>Una premisa </a:t>
             </a:r>
             <a:r>
               <a:rPr sz="2600" b="1">
@@ -6780,7 +6262,7 @@
                 </a:solidFill>
                 <a:latin typeface="Nunito Sans"/>
               </a:rPr>
-              <a:t>nombre</a:t>
+              <a:t>oculta</a:t>
             </a:r>
             <a:r>
               <a:rPr sz="2600" b="0">
@@ -6789,7 +6271,7 @@
                 </a:solidFill>
                 <a:latin typeface="Nunito Sans"/>
               </a:rPr>
-              <a:t> y hazle su pregunta.  (sesión 18)</a:t>
+              <a:t> no se dice, pero hace falta.  (sesión 18)</a:t>
             </a:r>
           </a:p>
           <a:p>
@@ -6814,7 +6296,7 @@
                 </a:solidFill>
                 <a:latin typeface="Nunito Sans"/>
               </a:rPr>
-              <a:t>El hombre de paja </a:t>
+              <a:t>La conclusión de una inducción es </a:t>
             </a:r>
             <a:r>
               <a:rPr sz="2600" b="1">
@@ -6823,7 +6305,7 @@
                 </a:solidFill>
                 <a:latin typeface="Nunito Sans"/>
               </a:rPr>
-              <a:t>deforma</a:t>
+              <a:t>probable</a:t>
             </a:r>
             <a:r>
               <a:rPr sz="2600" b="0">
@@ -6832,7 +6314,7 @@
                 </a:solidFill>
                 <a:latin typeface="Nunito Sans"/>
               </a:rPr>
-              <a:t> la idea del otro.  (sesión 18)</a:t>
+              <a:t>: puede fallar.  (sesión 18)</a:t>
             </a:r>
           </a:p>
           <a:p>
@@ -6857,7 +6339,7 @@
                 </a:solidFill>
                 <a:latin typeface="Nunito Sans"/>
               </a:rPr>
-              <a:t>La conclusión no siempre va al </a:t>
+              <a:t>El </a:t>
             </a:r>
             <a:r>
               <a:rPr sz="2600" b="1">
@@ -6866,7 +6348,7 @@
                 </a:solidFill>
                 <a:latin typeface="Nunito Sans"/>
               </a:rPr>
-              <a:t>final</a:t>
+              <a:t>consenso</a:t>
             </a:r>
             <a:r>
               <a:rPr sz="2600" b="0">
@@ -6875,7 +6357,7 @@
                 </a:solidFill>
                 <a:latin typeface="Nunito Sans"/>
               </a:rPr>
-              <a:t>.  (sesión 7)</a:t>
+              <a:t> es cuando casi todos los expertos de un tema están de acuerdo después de mirar las pruebas.  (sesión 7)</a:t>
             </a:r>
           </a:p>
         </p:txBody>
@@ -7022,7 +6504,7 @@
                 </a:solidFill>
                 <a:latin typeface="Nunito Sans"/>
               </a:rPr>
-              <a:t>«Mi primo compró unas zapatillas por internet y le llegaron rotas. Comprar por internet es siempre una estafa.»</a:t>
+              <a:t>«Este batido es el mejor. Lo toma el futbolista más famoso de la liga y lo compra todo el mundo.»</a:t>
             </a:r>
           </a:p>
         </p:txBody>
@@ -7061,7 +6543,7 @@
                 </a:solidFill>
                 <a:latin typeface="Nunito Sans"/>
               </a:rPr>
-              <a:t>¿Cuántos casos ha mirado? ¿Basta con eso para decir «siempre»?</a:t>
+              <a:t>¿Qué sabes de verdad del batido después de leer esto?</a:t>
             </a:r>
           </a:p>
         </p:txBody>
@@ -7165,7 +6647,7 @@
                 </a:solidFill>
                 <a:latin typeface="Fredoka"/>
               </a:rPr>
-              <a:t>De un caso a «todos»</a:t>
+              <a:t>Qué es una falacia</a:t>
             </a:r>
           </a:p>
         </p:txBody>
@@ -7230,7 +6712,7 @@
                 </a:solidFill>
                 <a:latin typeface="Nunito Sans"/>
               </a:rPr>
-              <a:t>BLOQUE 1 · DE UN CASO A «TODOS»</a:t>
+              <a:t>BLOQUE 1 · QUÉ ES UNA FALACIA</a:t>
             </a:r>
           </a:p>
         </p:txBody>
@@ -7269,7 +6751,7 @@
                 </a:solidFill>
                 <a:latin typeface="Fredoka"/>
               </a:rPr>
-              <a:t>Generalización apresurada</a:t>
+              <a:t>Falacia</a:t>
             </a:r>
           </a:p>
         </p:txBody>
@@ -7351,7 +6833,7 @@
                 </a:solidFill>
                 <a:latin typeface="Nunito Sans"/>
               </a:rPr>
-              <a:t>Sacar una conclusión sobre todos (o sobre «siempre») a partir de pocos casos que no bastan.</a:t>
+              <a:t>Solemos llamar falacia a un argumento que parece bueno, pero no lo es: sus razones no sostienen la conclusión.</a:t>
             </a:r>
           </a:p>
         </p:txBody>
@@ -7399,7 +6881,7 @@
                 </a:solidFill>
                 <a:latin typeface="Nunito Sans"/>
               </a:rPr>
-              <a:t>También se llama generalización </a:t>
+              <a:t>Puede ser un </a:t>
             </a:r>
             <a:r>
               <a:rPr sz="2800" b="1">
@@ -7408,7 +6890,16 @@
                 </a:solidFill>
                 <a:latin typeface="Nunito Sans"/>
               </a:rPr>
-              <a:t>precipitada</a:t>
+              <a:t>truco</a:t>
+            </a:r>
+            <a:r>
+              <a:rPr sz="2800" b="0">
+                <a:solidFill>
+                  <a:srgbClr val="1F2A44"/>
+                </a:solidFill>
+                <a:latin typeface="Nunito Sans"/>
+              </a:rPr>
+              <a:t> para engañar…</a:t>
             </a:r>
           </a:p>
           <a:p>
@@ -7433,59 +6924,41 @@
                 </a:solidFill>
                 <a:latin typeface="Nunito Sans"/>
               </a:rPr>
-              <a:t>Falla la pregunta </a:t>
-            </a:r>
+              <a:t>… o un error que cometemos sin darnos cuenta</a:t>
+            </a:r>
+          </a:p>
+          <a:p>
+            <a:pPr>
+              <a:spcAft>
+                <a:spcPts val="1260"/>
+              </a:spcAft>
+            </a:pPr>
             <a:r>
               <a:rPr sz="2800" b="1">
                 <a:solidFill>
+                  <a:srgbClr val="E8793A"/>
+                </a:solidFill>
+                <a:latin typeface="Nunito Sans"/>
+              </a:rPr>
+              <a:t>• </a:t>
+            </a:r>
+            <a:r>
+              <a:rPr sz="2800" b="0">
+                <a:solidFill>
                   <a:srgbClr val="1F2A44"/>
                 </a:solidFill>
                 <a:latin typeface="Nunito Sans"/>
               </a:rPr>
-              <a:t>¿es suficiente?</a:t>
-            </a:r>
-            <a:r>
-              <a:rPr sz="2800" b="0">
+              <a:t>Las más frecuentes tienen </a:t>
+            </a:r>
+            <a:r>
+              <a:rPr sz="2800" b="1">
                 <a:solidFill>
                   <a:srgbClr val="1F2A44"/>
                 </a:solidFill>
                 <a:latin typeface="Nunito Sans"/>
               </a:rPr>
-              <a:t> (sesión 9)</a:t>
-            </a:r>
-          </a:p>
-          <a:p>
-            <a:pPr>
-              <a:spcAft>
-                <a:spcPts val="1260"/>
-              </a:spcAft>
-            </a:pPr>
-            <a:r>
-              <a:rPr sz="2800" b="1">
-                <a:solidFill>
-                  <a:srgbClr val="E8793A"/>
-                </a:solidFill>
-                <a:latin typeface="Nunito Sans"/>
-              </a:rPr>
-              <a:t>• </a:t>
-            </a:r>
-            <a:r>
-              <a:rPr sz="2800" b="0">
-                <a:solidFill>
-                  <a:srgbClr val="1F2A44"/>
-                </a:solidFill>
-                <a:latin typeface="Nunito Sans"/>
-              </a:rPr>
-              <a:t>Pregunta: </a:t>
-            </a:r>
-            <a:r>
-              <a:rPr sz="2800" b="1">
-                <a:solidFill>
-                  <a:srgbClr val="1F2A44"/>
-                </a:solidFill>
-                <a:latin typeface="Nunito Sans"/>
-              </a:rPr>
-              <a:t>¿cuántos casos has mirado? ¿Son suficientes?</a:t>
+              <a:t>nombre</a:t>
             </a:r>
           </a:p>
         </p:txBody>
@@ -7550,7 +7023,7 @@
                 </a:solidFill>
                 <a:latin typeface="Nunito Sans"/>
               </a:rPr>
-              <a:t>BLOQUE 1 · DE UN CASO A «TODOS»</a:t>
+              <a:t>BLOQUE 1 · QUÉ ES UNA FALACIA</a:t>
             </a:r>
           </a:p>
         </p:txBody>
@@ -7589,315 +7062,7 @@
                 </a:solidFill>
                 <a:latin typeface="Fredoka"/>
               </a:rPr>
-              <a:t>Cómo reconocerla</a:t>
-            </a:r>
-          </a:p>
-        </p:txBody>
-      </p:sp>
-      <p:sp>
-        <p:nvSpPr>
-          <p:cNvPr id="4" name="TextBox 3"/>
-          <p:cNvSpPr txBox="1"/>
-          <p:nvPr/>
-        </p:nvSpPr>
-        <p:spPr>
-          <a:xfrm>
-            <a:off x="640000" y="1650000"/>
-            <a:ext cx="10912000" cy="4808000"/>
-          </a:xfrm>
-          <a:prstGeom prst="rect">
-            <a:avLst/>
-          </a:prstGeom>
-          <a:noFill/>
-        </p:spPr>
-        <p:txBody>
-          <a:bodyPr wrap="square">
-            <a:spAutoFit/>
-          </a:bodyPr>
-          <a:lstStyle/>
-          <a:p>
-            <a:pPr>
-              <a:spcAft>
-                <a:spcPts val="1260"/>
-              </a:spcAft>
-            </a:pPr>
-            <a:r>
-              <a:rPr sz="2800" b="1">
-                <a:solidFill>
-                  <a:srgbClr val="E8793A"/>
-                </a:solidFill>
-                <a:latin typeface="Nunito Sans"/>
-              </a:rPr>
-              <a:t>• </a:t>
-            </a:r>
-            <a:r>
-              <a:rPr sz="2800" b="0">
-                <a:solidFill>
-                  <a:srgbClr val="1F2A44"/>
-                </a:solidFill>
-                <a:latin typeface="Nunito Sans"/>
-              </a:rPr>
-              <a:t>Suele usar palabras como </a:t>
-            </a:r>
-            <a:r>
-              <a:rPr sz="2800" b="1">
-                <a:solidFill>
-                  <a:srgbClr val="1F2A44"/>
-                </a:solidFill>
-                <a:latin typeface="Nunito Sans"/>
-              </a:rPr>
-              <a:t>todos</a:t>
-            </a:r>
-            <a:r>
-              <a:rPr sz="2800" b="0">
-                <a:solidFill>
-                  <a:srgbClr val="1F2A44"/>
-                </a:solidFill>
-                <a:latin typeface="Nunito Sans"/>
-              </a:rPr>
-              <a:t>, </a:t>
-            </a:r>
-            <a:r>
-              <a:rPr sz="2800" b="1">
-                <a:solidFill>
-                  <a:srgbClr val="1F2A44"/>
-                </a:solidFill>
-                <a:latin typeface="Nunito Sans"/>
-              </a:rPr>
-              <a:t>nunca</a:t>
-            </a:r>
-            <a:r>
-              <a:rPr sz="2800" b="0">
-                <a:solidFill>
-                  <a:srgbClr val="1F2A44"/>
-                </a:solidFill>
-                <a:latin typeface="Nunito Sans"/>
-              </a:rPr>
-              <a:t>, </a:t>
-            </a:r>
-            <a:r>
-              <a:rPr sz="2800" b="1">
-                <a:solidFill>
-                  <a:srgbClr val="1F2A44"/>
-                </a:solidFill>
-                <a:latin typeface="Nunito Sans"/>
-              </a:rPr>
-              <a:t>siempre</a:t>
-            </a:r>
-            <a:r>
-              <a:rPr sz="2800" b="0">
-                <a:solidFill>
-                  <a:srgbClr val="1F2A44"/>
-                </a:solidFill>
-                <a:latin typeface="Nunito Sans"/>
-              </a:rPr>
-              <a:t>, </a:t>
-            </a:r>
-            <a:r>
-              <a:rPr sz="2800" b="1">
-                <a:solidFill>
-                  <a:srgbClr val="1F2A44"/>
-                </a:solidFill>
-                <a:latin typeface="Nunito Sans"/>
-              </a:rPr>
-              <a:t>ninguno</a:t>
-            </a:r>
-          </a:p>
-          <a:p>
-            <a:pPr>
-              <a:spcAft>
-                <a:spcPts val="1260"/>
-              </a:spcAft>
-            </a:pPr>
-            <a:r>
-              <a:rPr sz="2800" b="1">
-                <a:solidFill>
-                  <a:srgbClr val="E8793A"/>
-                </a:solidFill>
-                <a:latin typeface="Nunito Sans"/>
-              </a:rPr>
-              <a:t>• </a:t>
-            </a:r>
-            <a:r>
-              <a:rPr sz="2800" b="0">
-                <a:solidFill>
-                  <a:srgbClr val="1F2A44"/>
-                </a:solidFill>
-                <a:latin typeface="Nunito Sans"/>
-              </a:rPr>
-              <a:t>La prueba es un caso, dos o «uno que conozco»</a:t>
-            </a:r>
-          </a:p>
-          <a:p>
-            <a:pPr>
-              <a:spcAft>
-                <a:spcPts val="1260"/>
-              </a:spcAft>
-            </a:pPr>
-            <a:r>
-              <a:rPr sz="2800" b="1">
-                <a:solidFill>
-                  <a:srgbClr val="E8793A"/>
-                </a:solidFill>
-                <a:latin typeface="Nunito Sans"/>
-              </a:rPr>
-              <a:t>• </a:t>
-            </a:r>
-            <a:r>
-              <a:rPr sz="2800" b="0">
-                <a:solidFill>
-                  <a:srgbClr val="1F2A44"/>
-                </a:solidFill>
-                <a:latin typeface="Nunito Sans"/>
-              </a:rPr>
-              <a:t>Muchas veces habla de un grupo entero de personas</a:t>
-            </a:r>
-          </a:p>
-          <a:p>
-            <a:pPr>
-              <a:spcAft>
-                <a:spcPts val="1260"/>
-              </a:spcAft>
-            </a:pPr>
-            <a:r>
-              <a:rPr sz="2800" b="1">
-                <a:solidFill>
-                  <a:srgbClr val="E8793A"/>
-                </a:solidFill>
-                <a:latin typeface="Nunito Sans"/>
-              </a:rPr>
-              <a:t>• </a:t>
-            </a:r>
-            <a:r>
-              <a:rPr sz="2800" b="0">
-                <a:solidFill>
-                  <a:srgbClr val="1F2A44"/>
-                </a:solidFill>
-                <a:latin typeface="Nunito Sans"/>
-              </a:rPr>
-              <a:t>Así nacen muchos </a:t>
-            </a:r>
-            <a:r>
-              <a:rPr sz="2800" b="1">
-                <a:solidFill>
-                  <a:srgbClr val="1F2A44"/>
-                </a:solidFill>
-                <a:latin typeface="Nunito Sans"/>
-              </a:rPr>
-              <a:t>estereotipos</a:t>
-            </a:r>
-            <a:r>
-              <a:rPr sz="2800" b="0">
-                <a:solidFill>
-                  <a:srgbClr val="1F2A44"/>
-                </a:solidFill>
-                <a:latin typeface="Nunito Sans"/>
-              </a:rPr>
-              <a:t>: ideas fijas sobre un grupo</a:t>
-            </a:r>
-          </a:p>
-        </p:txBody>
-      </p:sp>
-    </p:spTree>
-  </p:cSld>
-  <p:clrMapOvr>
-    <a:masterClrMapping/>
-  </p:clrMapOvr>
-</p:sld>
-</file>
-
-<file path=ppt/slides/slide8.xml><?xml version="1.0" encoding="utf-8"?>
-<p:sld xmlns:a="http://schemas.openxmlformats.org/drawingml/2006/main" xmlns:p="http://schemas.openxmlformats.org/presentationml/2006/main" xmlns:r="http://schemas.openxmlformats.org/officeDocument/2006/relationships">
-  <p:cSld>
-    <p:bg>
-      <p:bgPr>
-        <a:solidFill>
-          <a:srgbClr val="FBF7EF"/>
-        </a:solidFill>
-        <a:effectLst/>
-      </p:bgPr>
-    </p:bg>
-    <p:spTree>
-      <p:nvGrpSpPr>
-        <p:cNvPr id="1" name=""/>
-        <p:cNvGrpSpPr/>
-        <p:nvPr/>
-      </p:nvGrpSpPr>
-      <p:grpSpPr/>
-      <p:sp>
-        <p:nvSpPr>
-          <p:cNvPr id="2" name="TextBox 1"/>
-          <p:cNvSpPr txBox="1"/>
-          <p:nvPr/>
-        </p:nvSpPr>
-        <p:spPr>
-          <a:xfrm>
-            <a:off x="640000" y="380000"/>
-            <a:ext cx="10912000" cy="420000"/>
-          </a:xfrm>
-          <a:prstGeom prst="rect">
-            <a:avLst/>
-          </a:prstGeom>
-          <a:noFill/>
-        </p:spPr>
-        <p:txBody>
-          <a:bodyPr wrap="square">
-            <a:spAutoFit/>
-          </a:bodyPr>
-          <a:lstStyle/>
-          <a:p>
-            <a:pPr>
-              <a:spcAft>
-                <a:spcPts val="630"/>
-              </a:spcAft>
-            </a:pPr>
-            <a:r>
-              <a:rPr sz="1400" b="1">
-                <a:solidFill>
-                  <a:srgbClr val="E8793A"/>
-                </a:solidFill>
-                <a:latin typeface="Nunito Sans"/>
-              </a:rPr>
-              <a:t>BLOQUE 1 · DE UN CASO A «TODOS»</a:t>
-            </a:r>
-          </a:p>
-        </p:txBody>
-      </p:sp>
-      <p:sp>
-        <p:nvSpPr>
-          <p:cNvPr id="3" name="TextBox 2"/>
-          <p:cNvSpPr txBox="1"/>
-          <p:nvPr/>
-        </p:nvSpPr>
-        <p:spPr>
-          <a:xfrm>
-            <a:off x="640000" y="760000"/>
-            <a:ext cx="10912000" cy="800000"/>
-          </a:xfrm>
-          <a:prstGeom prst="rect">
-            <a:avLst/>
-          </a:prstGeom>
-          <a:noFill/>
-        </p:spPr>
-        <p:txBody>
-          <a:bodyPr wrap="square">
-            <a:spAutoFit/>
-          </a:bodyPr>
-          <a:lstStyle/>
-          <a:p>
-            <a:pPr>
-              <a:spcAft>
-                <a:spcPts val="1710"/>
-              </a:spcAft>
-            </a:pPr>
-            <a:r>
-              <a:rPr sz="3800" b="1">
-                <a:solidFill>
-                  <a:srgbClr val="1F2A44"/>
-                </a:solidFill>
-                <a:latin typeface="Fredoka"/>
-              </a:rPr>
-              <a:t>De pocos casos a «todos»</a:t>
+              <a:t>¿Dónde falla una falacia? (sesión 15)</a:t>
             </a:r>
           </a:p>
         </p:txBody>
@@ -7937,7 +7102,7 @@
                           </a:solidFill>
                           <a:latin typeface="Fredoka"/>
                         </a:rPr>
-                        <a:t>Casos</a:t>
+                        <a:t>Pregunta</a:t>
                       </a:r>
                     </a:p>
                   </a:txBody>
@@ -7959,7 +7124,7 @@
                           </a:solidFill>
                           <a:latin typeface="Fredoka"/>
                         </a:rPr>
-                        <a:t>Conclusión apresurada</a:t>
+                        <a:t>Si falla…</a:t>
                       </a:r>
                     </a:p>
                   </a:txBody>
@@ -7977,13 +7142,13 @@
                     <a:lstStyle/>
                     <a:p>
                       <a:r>
-                        <a:rPr sz="2000" b="0">
+                        <a:rPr sz="2000" b="1">
                           <a:solidFill>
                             <a:srgbClr val="1F2A44"/>
                           </a:solidFill>
                           <a:latin typeface="Nunito Sans"/>
                         </a:rPr>
-                        <a:t>Dos chicos de otra clase se copian</a:t>
+                        <a:t>¿Es verdad?</a:t>
                       </a:r>
                     </a:p>
                   </a:txBody>
@@ -8005,7 +7170,7 @@
                           </a:solidFill>
                           <a:latin typeface="Nunito Sans"/>
                         </a:rPr>
-                        <a:t>«En esa clase son todos unos copiones»</a:t>
+                        <a:t>Dato falso: argumento malo, pero no suele llamarse falacia</a:t>
                       </a:r>
                     </a:p>
                   </a:txBody>
@@ -8023,13 +7188,13 @@
                     <a:lstStyle/>
                     <a:p>
                       <a:r>
-                        <a:rPr sz="2000" b="0">
+                        <a:rPr sz="2000" b="1">
                           <a:solidFill>
                             <a:srgbClr val="1F2A44"/>
                           </a:solidFill>
                           <a:latin typeface="Nunito Sans"/>
                         </a:rPr>
-                        <a:t>Un videojuego de una marca me aburrió</a:t>
+                        <a:t>¿Viene a cuento?</a:t>
                       </a:r>
                     </a:p>
                   </a:txBody>
@@ -8051,7 +7216,7 @@
                           </a:solidFill>
                           <a:latin typeface="Nunito Sans"/>
                         </a:rPr>
-                        <a:t>«Los juegos de esa marca son malos»</a:t>
+                        <a:t>Habla de otra cosa: aquí fallan muchas falacias</a:t>
                       </a:r>
                     </a:p>
                   </a:txBody>
@@ -8069,13 +7234,13 @@
                     <a:lstStyle/>
                     <a:p>
                       <a:r>
-                        <a:rPr sz="2000" b="0">
+                        <a:rPr sz="2000" b="1">
                           <a:solidFill>
                             <a:srgbClr val="1F2A44"/>
                           </a:solidFill>
                           <a:latin typeface="Nunito Sans"/>
                         </a:rPr>
-                        <a:t>Un día el metro llegó tarde</a:t>
+                        <a:t>¿Es suficiente?</a:t>
                       </a:r>
                     </a:p>
                   </a:txBody>
@@ -8097,7 +7262,7 @@
                           </a:solidFill>
                           <a:latin typeface="Nunito Sans"/>
                         </a:rPr>
-                        <a:t>«El metro nunca es puntual»</a:t>
+                        <a:t>Poco para una conclusión tan grande: otra falacia típica</a:t>
                       </a:r>
                     </a:p>
                   </a:txBody>
@@ -8112,6 +7277,470 @@
           </a:graphicData>
         </a:graphic>
       </p:graphicFrame>
+    </p:spTree>
+  </p:cSld>
+  <p:clrMapOvr>
+    <a:masterClrMapping/>
+  </p:clrMapOvr>
+</p:sld>
+</file>
+
+<file path=ppt/slides/slide8.xml><?xml version="1.0" encoding="utf-8"?>
+<p:sld xmlns:a="http://schemas.openxmlformats.org/drawingml/2006/main" xmlns:p="http://schemas.openxmlformats.org/presentationml/2006/main" xmlns:r="http://schemas.openxmlformats.org/officeDocument/2006/relationships">
+  <p:cSld>
+    <p:bg>
+      <p:bgPr>
+        <a:solidFill>
+          <a:srgbClr val="FBF7EF"/>
+        </a:solidFill>
+        <a:effectLst/>
+      </p:bgPr>
+    </p:bg>
+    <p:spTree>
+      <p:nvGrpSpPr>
+        <p:cNvPr id="1" name=""/>
+        <p:cNvGrpSpPr/>
+        <p:nvPr/>
+      </p:nvGrpSpPr>
+      <p:grpSpPr/>
+      <p:sp>
+        <p:nvSpPr>
+          <p:cNvPr id="2" name="TextBox 1"/>
+          <p:cNvSpPr txBox="1"/>
+          <p:nvPr/>
+        </p:nvSpPr>
+        <p:spPr>
+          <a:xfrm>
+            <a:off x="640000" y="380000"/>
+            <a:ext cx="10912000" cy="420000"/>
+          </a:xfrm>
+          <a:prstGeom prst="rect">
+            <a:avLst/>
+          </a:prstGeom>
+          <a:noFill/>
+        </p:spPr>
+        <p:txBody>
+          <a:bodyPr wrap="square">
+            <a:spAutoFit/>
+          </a:bodyPr>
+          <a:lstStyle/>
+          <a:p>
+            <a:pPr>
+              <a:spcAft>
+                <a:spcPts val="630"/>
+              </a:spcAft>
+            </a:pPr>
+            <a:r>
+              <a:rPr sz="1400" b="1">
+                <a:solidFill>
+                  <a:srgbClr val="E8793A"/>
+                </a:solidFill>
+                <a:latin typeface="Nunito Sans"/>
+              </a:rPr>
+              <a:t>BLOQUE 1 · QUÉ ES UNA FALACIA</a:t>
+            </a:r>
+          </a:p>
+        </p:txBody>
+      </p:sp>
+      <p:sp>
+        <p:nvSpPr>
+          <p:cNvPr id="3" name="TextBox 2"/>
+          <p:cNvSpPr txBox="1"/>
+          <p:nvPr/>
+        </p:nvSpPr>
+        <p:spPr>
+          <a:xfrm>
+            <a:off x="640000" y="760000"/>
+            <a:ext cx="10912000" cy="800000"/>
+          </a:xfrm>
+          <a:prstGeom prst="rect">
+            <a:avLst/>
+          </a:prstGeom>
+          <a:noFill/>
+        </p:spPr>
+        <p:txBody>
+          <a:bodyPr wrap="square">
+            <a:spAutoFit/>
+          </a:bodyPr>
+          <a:lstStyle/>
+          <a:p>
+            <a:pPr>
+              <a:spcAft>
+                <a:spcPts val="1710"/>
+              </a:spcAft>
+            </a:pPr>
+            <a:r>
+              <a:rPr sz="3800" b="1">
+                <a:solidFill>
+                  <a:srgbClr val="1F2A44"/>
+                </a:solidFill>
+                <a:latin typeface="Fredoka"/>
+              </a:rPr>
+              <a:t>Lo que es y lo que no es</a:t>
+            </a:r>
+          </a:p>
+        </p:txBody>
+      </p:sp>
+      <p:sp>
+        <p:nvSpPr>
+          <p:cNvPr id="4" name="Rectangle 3"/>
+          <p:cNvSpPr/>
+          <p:nvPr/>
+        </p:nvSpPr>
+        <p:spPr>
+          <a:xfrm>
+            <a:off x="640000" y="1650000"/>
+            <a:ext cx="5306000" cy="4400000"/>
+          </a:xfrm>
+          <a:prstGeom prst="rect">
+            <a:avLst/>
+          </a:prstGeom>
+          <a:solidFill>
+            <a:srgbClr val="FBE3D2"/>
+          </a:solidFill>
+          <a:ln>
+            <a:noFill/>
+          </a:ln>
+        </p:spPr>
+        <p:style>
+          <a:lnRef idx="1">
+            <a:schemeClr val="accent1"/>
+          </a:lnRef>
+          <a:fillRef idx="3">
+            <a:schemeClr val="accent1"/>
+          </a:fillRef>
+          <a:effectRef idx="2">
+            <a:schemeClr val="accent1"/>
+          </a:effectRef>
+          <a:fontRef idx="minor">
+            <a:schemeClr val="lt1"/>
+          </a:fontRef>
+        </p:style>
+        <p:txBody>
+          <a:bodyPr rtlCol="0" anchor="ctr"/>
+          <a:lstStyle/>
+          <a:p>
+            <a:pPr algn="ctr"/>
+          </a:p>
+        </p:txBody>
+      </p:sp>
+      <p:sp>
+        <p:nvSpPr>
+          <p:cNvPr id="5" name="TextBox 4"/>
+          <p:cNvSpPr txBox="1"/>
+          <p:nvPr/>
+        </p:nvSpPr>
+        <p:spPr>
+          <a:xfrm>
+            <a:off x="840000" y="1750000"/>
+            <a:ext cx="4906000" cy="600000"/>
+          </a:xfrm>
+          <a:prstGeom prst="rect">
+            <a:avLst/>
+          </a:prstGeom>
+          <a:noFill/>
+        </p:spPr>
+        <p:txBody>
+          <a:bodyPr wrap="square">
+            <a:spAutoFit/>
+          </a:bodyPr>
+          <a:lstStyle/>
+          <a:p>
+            <a:pPr>
+              <a:spcAft>
+                <a:spcPts val="1260"/>
+              </a:spcAft>
+            </a:pPr>
+            <a:r>
+              <a:rPr sz="2800" b="1">
+                <a:solidFill>
+                  <a:srgbClr val="C2531C"/>
+                </a:solidFill>
+                <a:latin typeface="Nunito Sans"/>
+              </a:rPr>
+              <a:t>No es falacia</a:t>
+            </a:r>
+          </a:p>
+        </p:txBody>
+      </p:sp>
+      <p:sp>
+        <p:nvSpPr>
+          <p:cNvPr id="6" name="TextBox 5"/>
+          <p:cNvSpPr txBox="1"/>
+          <p:nvPr/>
+        </p:nvSpPr>
+        <p:spPr>
+          <a:xfrm>
+            <a:off x="840000" y="2400000"/>
+            <a:ext cx="4906000" cy="3500000"/>
+          </a:xfrm>
+          <a:prstGeom prst="rect">
+            <a:avLst/>
+          </a:prstGeom>
+          <a:noFill/>
+        </p:spPr>
+        <p:txBody>
+          <a:bodyPr wrap="square">
+            <a:spAutoFit/>
+          </a:bodyPr>
+          <a:lstStyle/>
+          <a:p>
+            <a:pPr>
+              <a:spcAft>
+                <a:spcPts val="1170"/>
+              </a:spcAft>
+            </a:pPr>
+            <a:r>
+              <a:rPr sz="2600" b="1">
+                <a:solidFill>
+                  <a:srgbClr val="E8793A"/>
+                </a:solidFill>
+                <a:latin typeface="Nunito Sans"/>
+              </a:rPr>
+              <a:t>• </a:t>
+            </a:r>
+            <a:r>
+              <a:rPr sz="2600" b="0">
+                <a:solidFill>
+                  <a:srgbClr val="1F2A44"/>
+                </a:solidFill>
+                <a:latin typeface="Nunito Sans"/>
+              </a:rPr>
+              <a:t>Una opinión con la que no estoy de acuerdo</a:t>
+            </a:r>
+          </a:p>
+          <a:p>
+            <a:pPr>
+              <a:spcAft>
+                <a:spcPts val="1170"/>
+              </a:spcAft>
+            </a:pPr>
+            <a:r>
+              <a:rPr sz="2600" b="1">
+                <a:solidFill>
+                  <a:srgbClr val="E8793A"/>
+                </a:solidFill>
+                <a:latin typeface="Nunito Sans"/>
+              </a:rPr>
+              <a:t>• </a:t>
+            </a:r>
+            <a:r>
+              <a:rPr sz="2600" b="0">
+                <a:solidFill>
+                  <a:srgbClr val="1F2A44"/>
+                </a:solidFill>
+                <a:latin typeface="Nunito Sans"/>
+              </a:rPr>
+              <a:t>Una frase falsa, sin más</a:t>
+            </a:r>
+          </a:p>
+          <a:p>
+            <a:pPr>
+              <a:spcAft>
+                <a:spcPts val="1170"/>
+              </a:spcAft>
+            </a:pPr>
+            <a:r>
+              <a:rPr sz="2600" b="1">
+                <a:solidFill>
+                  <a:srgbClr val="E8793A"/>
+                </a:solidFill>
+                <a:latin typeface="Nunito Sans"/>
+              </a:rPr>
+              <a:t>• </a:t>
+            </a:r>
+            <a:r>
+              <a:rPr sz="2600" b="0">
+                <a:solidFill>
+                  <a:srgbClr val="1F2A44"/>
+                </a:solidFill>
+                <a:latin typeface="Nunito Sans"/>
+              </a:rPr>
+              <a:t>Cualquier argumento que no me convence</a:t>
+            </a:r>
+          </a:p>
+        </p:txBody>
+      </p:sp>
+      <p:sp>
+        <p:nvSpPr>
+          <p:cNvPr id="7" name="Rectangle 6"/>
+          <p:cNvSpPr/>
+          <p:nvPr/>
+        </p:nvSpPr>
+        <p:spPr>
+          <a:xfrm>
+            <a:off x="6246000" y="1650000"/>
+            <a:ext cx="5306000" cy="4400000"/>
+          </a:xfrm>
+          <a:prstGeom prst="rect">
+            <a:avLst/>
+          </a:prstGeom>
+          <a:solidFill>
+            <a:srgbClr val="EAF0F7"/>
+          </a:solidFill>
+          <a:ln>
+            <a:noFill/>
+          </a:ln>
+        </p:spPr>
+        <p:style>
+          <a:lnRef idx="1">
+            <a:schemeClr val="accent1"/>
+          </a:lnRef>
+          <a:fillRef idx="3">
+            <a:schemeClr val="accent1"/>
+          </a:fillRef>
+          <a:effectRef idx="2">
+            <a:schemeClr val="accent1"/>
+          </a:effectRef>
+          <a:fontRef idx="minor">
+            <a:schemeClr val="lt1"/>
+          </a:fontRef>
+        </p:style>
+        <p:txBody>
+          <a:bodyPr rtlCol="0" anchor="ctr"/>
+          <a:lstStyle/>
+          <a:p>
+            <a:pPr algn="ctr"/>
+          </a:p>
+        </p:txBody>
+      </p:sp>
+      <p:sp>
+        <p:nvSpPr>
+          <p:cNvPr id="8" name="TextBox 7"/>
+          <p:cNvSpPr txBox="1"/>
+          <p:nvPr/>
+        </p:nvSpPr>
+        <p:spPr>
+          <a:xfrm>
+            <a:off x="6446000" y="1750000"/>
+            <a:ext cx="4906000" cy="600000"/>
+          </a:xfrm>
+          <a:prstGeom prst="rect">
+            <a:avLst/>
+          </a:prstGeom>
+          <a:noFill/>
+        </p:spPr>
+        <p:txBody>
+          <a:bodyPr wrap="square">
+            <a:spAutoFit/>
+          </a:bodyPr>
+          <a:lstStyle/>
+          <a:p>
+            <a:pPr>
+              <a:spcAft>
+                <a:spcPts val="1260"/>
+              </a:spcAft>
+            </a:pPr>
+            <a:r>
+              <a:rPr sz="2800" b="1">
+                <a:solidFill>
+                  <a:srgbClr val="2F6FB5"/>
+                </a:solidFill>
+                <a:latin typeface="Nunito Sans"/>
+              </a:rPr>
+              <a:t>Sí es falacia</a:t>
+            </a:r>
+          </a:p>
+        </p:txBody>
+      </p:sp>
+      <p:sp>
+        <p:nvSpPr>
+          <p:cNvPr id="9" name="TextBox 8"/>
+          <p:cNvSpPr txBox="1"/>
+          <p:nvPr/>
+        </p:nvSpPr>
+        <p:spPr>
+          <a:xfrm>
+            <a:off x="6446000" y="2400000"/>
+            <a:ext cx="4906000" cy="3500000"/>
+          </a:xfrm>
+          <a:prstGeom prst="rect">
+            <a:avLst/>
+          </a:prstGeom>
+          <a:noFill/>
+        </p:spPr>
+        <p:txBody>
+          <a:bodyPr wrap="square">
+            <a:spAutoFit/>
+          </a:bodyPr>
+          <a:lstStyle/>
+          <a:p>
+            <a:pPr>
+              <a:spcAft>
+                <a:spcPts val="1170"/>
+              </a:spcAft>
+            </a:pPr>
+            <a:r>
+              <a:rPr sz="2600" b="1">
+                <a:solidFill>
+                  <a:srgbClr val="E8793A"/>
+                </a:solidFill>
+                <a:latin typeface="Nunito Sans"/>
+              </a:rPr>
+              <a:t>• </a:t>
+            </a:r>
+            <a:r>
+              <a:rPr sz="2600" b="0">
+                <a:solidFill>
+                  <a:srgbClr val="1F2A44"/>
+                </a:solidFill>
+                <a:latin typeface="Nunito Sans"/>
+              </a:rPr>
+              <a:t>Un argumento con un fallo escondido</a:t>
+            </a:r>
+          </a:p>
+          <a:p>
+            <a:pPr>
+              <a:spcAft>
+                <a:spcPts val="1170"/>
+              </a:spcAft>
+            </a:pPr>
+            <a:r>
+              <a:rPr sz="2600" b="1">
+                <a:solidFill>
+                  <a:srgbClr val="E8793A"/>
+                </a:solidFill>
+                <a:latin typeface="Nunito Sans"/>
+              </a:rPr>
+              <a:t>• </a:t>
+            </a:r>
+            <a:r>
+              <a:rPr sz="2600" b="0">
+                <a:solidFill>
+                  <a:srgbClr val="1F2A44"/>
+                </a:solidFill>
+                <a:latin typeface="Nunito Sans"/>
+              </a:rPr>
+              <a:t>Unas razones que no llevan a la conclusión</a:t>
+            </a:r>
+          </a:p>
+          <a:p>
+            <a:pPr>
+              <a:spcAft>
+                <a:spcPts val="1170"/>
+              </a:spcAft>
+            </a:pPr>
+            <a:r>
+              <a:rPr sz="2600" b="1">
+                <a:solidFill>
+                  <a:srgbClr val="E8793A"/>
+                </a:solidFill>
+                <a:latin typeface="Nunito Sans"/>
+              </a:rPr>
+              <a:t>• </a:t>
+            </a:r>
+            <a:r>
+              <a:rPr sz="2600" b="0">
+                <a:solidFill>
+                  <a:srgbClr val="1F2A44"/>
+                </a:solidFill>
+                <a:latin typeface="Nunito Sans"/>
+              </a:rPr>
+              <a:t>Un truco que se puede nombrar y desmontar</a:t>
+            </a:r>
+          </a:p>
+        </p:txBody>
+      </p:sp>
     </p:spTree>
   </p:cSld>
   <p:clrMapOvr>
